--- a/温度计+新闻/科技温度计周报PPT/科技温度计周报.pptx
+++ b/温度计+新闻/科技温度计周报PPT/科技温度计周报.pptx
@@ -1,18 +1,18 @@
 
 <file path=ppt/presentation.xml><?xml version="1.0" encoding="utf-8"?>
-<p:presentation xmlns:r="http://schemas.openxmlformats.org/officeDocument/2006/relationships" xmlns:p="http://schemas.openxmlformats.org/presentationml/2006/main" xmlns:a="http://schemas.openxmlformats.org/drawingml/2006/main" firstSlideNum="1">
+<p:presentation xmlns:a="http://schemas.openxmlformats.org/drawingml/2006/main" xmlns:r="http://schemas.openxmlformats.org/officeDocument/2006/relationships" xmlns:p="http://schemas.openxmlformats.org/presentationml/2006/main">
   <p:sldMasterIdLst>
-    <p:sldMasterId id="2147483648" r:id="rId0"/>
+    <p:sldMasterId id="2147483648" r:id="rId1"/>
   </p:sldMasterIdLst>
   <p:notesMasterIdLst>
-    <p:notesMasterId r:id="rId3"/>
+    <p:notesMasterId r:id="rId5"/>
   </p:notesMasterIdLst>
   <p:sldIdLst>
-    <p:sldId id="256" r:id="rId1"/>
-    <p:sldId id="257" r:id="rId2"/>
+    <p:sldId id="256" r:id="rId3"/>
+    <p:sldId id="257" r:id="rId4"/>
   </p:sldIdLst>
   <p:sldSz cx="12192000" cy="6858000"/>
-  <p:notesSz cx="6858000" cy="12192000"/>
+  <p:notesSz cx="12192000" cy="6858000"/>
   <p:defaultTextStyle>
     <a:lvl1pPr marL="0" algn="l" defTabSz="914400" rtl="0" eaLnBrk="1" latinLnBrk="0" hangingPunct="1">
       <a:defRPr sz="1800" kern="1200">
@@ -109,7 +109,7 @@
 </file>
 
 <file path=ppt/notesMasters/notesMaster1.xml><?xml version="1.0" encoding="utf-8"?>
-<p:notesMaster xmlns:p="http://schemas.openxmlformats.org/presentationml/2006/main" xmlns:a="http://schemas.openxmlformats.org/drawingml/2006/main">
+<p:notesMaster xmlns:a="http://schemas.openxmlformats.org/drawingml/2006/main" xmlns:r="http://schemas.openxmlformats.org/officeDocument/2006/relationships" xmlns:p="http://schemas.openxmlformats.org/presentationml/2006/main">
   <p:cSld>
     <p:bg>
       <p:bgRef idx="1001">
@@ -229,7 +229,7 @@
 </file>
 
 <file path=ppt/slideLayouts/slideLayout1.xml><?xml version="1.0" encoding="utf-8"?>
-<p:sldLayout xmlns:p="http://schemas.openxmlformats.org/presentationml/2006/main" xmlns:a="http://schemas.openxmlformats.org/drawingml/2006/main">
+<p:sldLayout xmlns:a="http://schemas.openxmlformats.org/drawingml/2006/main" xmlns:r="http://schemas.openxmlformats.org/officeDocument/2006/relationships" xmlns:p="http://schemas.openxmlformats.org/presentationml/2006/main">
   <p:cSld name="DEFAULT">
     <p:bg>
       <p:bgRef idx="1001">
@@ -259,7 +259,7 @@
 </file>
 
 <file path=ppt/slideMasters/slideMaster1.xml><?xml version="1.0" encoding="utf-8"?>
-<p:sldMaster xmlns:r="http://schemas.openxmlformats.org/officeDocument/2006/relationships" xmlns:p="http://schemas.openxmlformats.org/presentationml/2006/main" xmlns:a="http://schemas.openxmlformats.org/drawingml/2006/main">
+<p:sldMaster xmlns:a="http://schemas.openxmlformats.org/drawingml/2006/main" xmlns:r="http://schemas.openxmlformats.org/officeDocument/2006/relationships" xmlns:p="http://schemas.openxmlformats.org/presentationml/2006/main">
   <p:cSld>
     <p:bg>
       <p:bgRef idx="1001">
@@ -284,14 +284,14 @@
   </p:cSld>
   <p:clrMap bg1="lt1" tx1="dk1" bg2="lt2" tx2="dk2" accent1="accent1" accent2="accent2" accent3="accent3" accent4="accent4" accent5="accent5" accent6="accent6" hlink="hlink" folHlink="folHlink"/>
   <p:sldLayoutIdLst>
-    <p:sldLayoutId id="2147483649" r:id="rId0"/>
+    <p:sldLayoutId id="2147483649" r:id="rId1"/>
   </p:sldLayoutIdLst>
   <p:hf sldNum="0" hdr="0" ftr="0" dt="0"/>
   <p:txStyles>
     <p:titleStyle>
       <a:lvl1pPr algn="ctr" defTabSz="914400" rtl="0" eaLnBrk="1" latinLnBrk="0" hangingPunct="1">
         <a:spcBef>
-          <a:spcPct val="1"/>
+          <a:spcPct val="0"/>
         </a:spcBef>
         <a:buNone/>
         <a:defRPr sz="4400" kern="1200">
@@ -309,7 +309,7 @@
         <a:spcBef>
           <a:spcPct val="20000"/>
         </a:spcBef>
-        <a:buFont typeface="Arial" pitchFamily="34" charset="0"/>
+        <a:buFont typeface="Arial" panose="020B0604020202090204" pitchFamily="34" charset="0"/>
         <a:buChar char="•"/>
         <a:defRPr sz="3200" kern="1200">
           <a:solidFill>
@@ -324,7 +324,7 @@
         <a:spcBef>
           <a:spcPct val="20000"/>
         </a:spcBef>
-        <a:buFont typeface="Arial" pitchFamily="34" charset="0"/>
+        <a:buFont typeface="Arial" panose="020B0604020202090204" pitchFamily="34" charset="0"/>
         <a:buChar char="–"/>
         <a:defRPr sz="2800" kern="1200">
           <a:solidFill>
@@ -339,7 +339,7 @@
         <a:spcBef>
           <a:spcPct val="20000"/>
         </a:spcBef>
-        <a:buFont typeface="Arial" pitchFamily="34" charset="0"/>
+        <a:buFont typeface="Arial" panose="020B0604020202090204" pitchFamily="34" charset="0"/>
         <a:buChar char="•"/>
         <a:defRPr sz="2400" kern="1200">
           <a:solidFill>
@@ -354,7 +354,7 @@
         <a:spcBef>
           <a:spcPct val="20000"/>
         </a:spcBef>
-        <a:buFont typeface="Arial" pitchFamily="34" charset="0"/>
+        <a:buFont typeface="Arial" panose="020B0604020202090204" pitchFamily="34" charset="0"/>
         <a:buChar char="–"/>
         <a:defRPr sz="2000" kern="1200">
           <a:solidFill>
@@ -369,7 +369,7 @@
         <a:spcBef>
           <a:spcPct val="20000"/>
         </a:spcBef>
-        <a:buFont typeface="Arial" pitchFamily="34" charset="0"/>
+        <a:buFont typeface="Arial" panose="020B0604020202090204" pitchFamily="34" charset="0"/>
         <a:buChar char="»"/>
         <a:defRPr sz="2000" kern="1200">
           <a:solidFill>
@@ -384,7 +384,7 @@
         <a:spcBef>
           <a:spcPct val="20000"/>
         </a:spcBef>
-        <a:buFont typeface="Arial" pitchFamily="34" charset="0"/>
+        <a:buFont typeface="Arial" panose="020B0604020202090204" pitchFamily="34" charset="0"/>
         <a:buChar char="•"/>
         <a:defRPr sz="2000" kern="1200">
           <a:solidFill>
@@ -399,7 +399,7 @@
         <a:spcBef>
           <a:spcPct val="20000"/>
         </a:spcBef>
-        <a:buFont typeface="Arial" pitchFamily="34" charset="0"/>
+        <a:buFont typeface="Arial" panose="020B0604020202090204" pitchFamily="34" charset="0"/>
         <a:buChar char="•"/>
         <a:defRPr sz="2000" kern="1200">
           <a:solidFill>
@@ -414,7 +414,7 @@
         <a:spcBef>
           <a:spcPct val="20000"/>
         </a:spcBef>
-        <a:buFont typeface="Arial" pitchFamily="34" charset="0"/>
+        <a:buFont typeface="Arial" panose="020B0604020202090204" pitchFamily="34" charset="0"/>
         <a:buChar char="•"/>
         <a:defRPr sz="2000" kern="1200">
           <a:solidFill>
@@ -429,7 +429,7 @@
         <a:spcBef>
           <a:spcPct val="20000"/>
         </a:spcBef>
-        <a:buFont typeface="Arial" pitchFamily="34" charset="0"/>
+        <a:buFont typeface="Arial" panose="020B0604020202090204" pitchFamily="34" charset="0"/>
         <a:buChar char="•"/>
         <a:defRPr sz="2000" kern="1200">
           <a:solidFill>
@@ -541,11 +541,11 @@
 </file>
 
 <file path=ppt/slides/slide1.xml><?xml version="1.0" encoding="utf-8"?>
-<p:sld xmlns:r="http://schemas.openxmlformats.org/officeDocument/2006/relationships" xmlns:p="http://schemas.openxmlformats.org/presentationml/2006/main" xmlns:a="http://schemas.openxmlformats.org/drawingml/2006/main">
+<p:sld xmlns:a="http://schemas.openxmlformats.org/drawingml/2006/main" xmlns:r="http://schemas.openxmlformats.org/officeDocument/2006/relationships" xmlns:p="http://schemas.openxmlformats.org/presentationml/2006/main">
   <p:cSld>
     <p:spTree>
       <p:nvGrpSpPr>
-        <p:cNvPr id="1" name="" descr="&lt;Slide style={{ width: 1280, height: 720, background: '#F4F6F9', fontFamily: 'PingFang SC', display: 'flex', flexDirection: 'column' }}&gt;&#10;&#10;  &lt;Box style={{ height: 88, background: '#1F3A6E', padding: '0 40px', display: 'flex', alignItems: 'center', justifyContent: 'space-between' }}&gt;&#10;    &lt;Box&gt;&#10;      &lt;Text style={{ fontSize: 25, fontWeight: '600', color: '#FFFFFF' }}&gt;科技温度计周报｜市场情绪监测&lt;/Text&gt;&#10;      &lt;Text style={{ fontSize: 12, color: 'rgba(255,255,255,0.75)', marginTop: 5 }}&gt;信号源：科技温度计　|　标的：产业趋势组合（模拟）　|　数据截至 2026-09-22&lt;/Text&gt;&#10;    &lt;/Box&gt;&#10;    &lt;Text style={{ fontSize: 13, color: 'rgba(255,255,255,0.85)' }}&gt;2026 年第 39 周&lt;/Text&gt;&#10;  &lt;/Box&gt;&#10;&#10;  &lt;Box style={{ padding: '14px 40px 0' }}&gt;&#10;    &lt;Box style={{ display: 'flex', gap: 14, height: 86 }}&gt;&#10;      &lt;Box style={{ flex: 1, background: '#FFFFFF', border: '1px solid #E5E8EE', borderRadius: 12, padding: '12px 20px' }}&gt;&#10;        &lt;Text style={{ fontSize: 12, color: '#7B8494' }}&gt;当前温度计读数（09-22）&lt;/Text&gt;&#10;        &lt;Text style={{ fontSize: 34, fontWeight: '600', color: '#2F6FED', marginTop: 2 }}&gt;41.8°&lt;/Text&gt;&#10;      &lt;/Box&gt;&#10;      &lt;Box style={{ flex: 1, background: '#FFFFFF', border: '1px solid #E5E8EE', borderRadius: 12, padding: '12px 20px' }}&gt;&#10;        &lt;Text style={{ fontSize: 12, color: '#7B8494' }}&gt;上周五读数（09-18）&lt;/Text&gt;&#10;        &lt;Text style={{ fontSize: 34, fontWeight: '600', color: '#4A5464', marginTop: 2 }}&gt;40.4°&lt;/Text&gt;&#10;      &lt;/Box&gt;&#10;      &lt;Box style={{ flex: 1, background: '#FFF7F7', border: '1px solid #F2D4D4', borderRadius: 12, padding: '12px 20px' }}&gt;&#10;        &lt;Text style={{ fontSize: 12, color: '#7B8494' }}&gt;边际变化（较上周五）&lt;/Text&gt;&#10;        &lt;Text style={{ fontSize: 34, fontWeight: '600', color: '#D93636', marginTop: 2 }}&gt;+1.4° ↑ 回升&lt;/Text&gt;&#10;      &lt;/Box&gt;&#10;      &lt;Box style={{ flex: 1.15, background: '#FFFFFF', border: '1px solid #E5E8EE', borderRadius: 12, padding: '12px 20px' }}&gt;&#10;        &lt;Text style={{ fontSize: 12, color: '#7B8494' }}&gt;所处区间（40° 为低温阈值）&lt;/Text&gt;&#10;        &lt;Text style={{ fontSize: 16, fontWeight: '600', color: '#1A1D26', marginTop: 8 }}&gt;已回升至 40° 上方，脱离低温触发区&lt;/Text&gt;&#10;        &lt;Text style={{ fontSize: 11.5, color: '#9AA3B2', marginTop: 2 }}&gt;上周五尚在触发区边缘（40.4°）&lt;/Text&gt;&#10;      &lt;/Box&gt;&#10;    &lt;/Box&gt;&#10;&#10;    &lt;Box style={{ marginTop: 12, background: '#FFFFFF', border: '1px solid #E5E8EE', borderRadius: 12, padding: '10px 12px', display: 'flex', justifyContent: 'center', alignItems: 'center' }}&gt;&#10;      &lt;Image src=&quot;assets/p1_temp_tmt.png&quot; style={{ width: 1046, height: 417 }} /&gt;&#10;    &lt;/Box&gt;&#10;&#10;    &lt;Box style={{ marginTop: 8, background: '#EFF4FE', borderRadius: 10, padding: '9px 18px' }}&gt;&#10;      &lt;Text style={{ fontSize: 12.5, color: '#1A1D26', lineHeight: 1.55 }}&gt;&#10;        &lt;Text style={{ fontWeight: '600', color: '#1F3A6E' }}&gt;本周解读：&lt;/Text&gt;温度计较上周五回升 1.4°，主要由「上涨股票占比」（18.8→26.1，+7.3pt）与「250日月跌幅均指滚动百分位」（29.7→34.9，+5.2pt）两项因子得分修复驱动，行业拥挤度（77.1→72.6，−4.5pt）回落形成部分对冲。温度计为 10 因子等权合成，周内对比区间 2026-09-18 → 2026-09-22。&#10;      &lt;/Text&gt;&#10;    &lt;/Box&gt;&#10;  &lt;/Box&gt;&#10;&#10;  &lt;Box style={{ position: 'absolute', left: 0, right: 0, bottom: 0, height: 30, background: '#1F3A6E', display: 'flex', alignItems: 'center', justifyContent: 'flex-end', padding: '0 40px' }}&gt;&#10;    &lt;Text style={{ fontSize: 11, color: 'rgba(255,255,255,0.8)' }}&gt;01 / 02&lt;/Text&gt;&#10;  &lt;/Box&gt;&#10;&#10;&lt;/Slide&gt;&#10;"/>
+        <p:cNvPr id="1" name="" descr="&lt;Slide style={{ width: 1280, height: 720, background: '#F4F6F9', fontFamily: 'PingFang SC', display: 'flex', flexDirection: 'column' }}&gt;&#10;&#10;  &lt;Box style={{ height: 88, background: '#1F3A6E', padding: '0 40px', display: 'flex', alignItems: 'center', justifyContent: 'space-between' }}&gt;&#10;    &lt;Box&gt;&#10;      &lt;Text style={{ fontSize: 25, fontWeight: '600', color: '#FFFFFF' }}&gt;科技温度计周报｜市场情绪监测&lt;/Text&gt;&#10;      &lt;Text style={{ fontSize: 12, color: 'rgba(255,255,255,0.75)', marginTop: 5 }}&gt;信号源：科技温度计　|　标的：产业趋势组合（模拟）　|　数据截至 2026-09-24&lt;/Text&gt;&#10;    &lt;/Box&gt;&#10;    &lt;Text style={{ fontSize: 13, color: 'rgba(255,255,255,0.85)' }}&gt;2026 年第 40 周&lt;/Text&gt;&#10;  &lt;/Box&gt;&#10;&#10;  &lt;Box style={{ padding: '14px 40px 0' }}&gt;&#10;    &lt;Box style={{ display: 'flex', gap: 16, height: 88 }}&gt;&#10;      &lt;Box style={{ flex: 1, background: '#FFFFFF', border: '1px solid #E5E8EE', borderRadius: 12, padding: '13px 24px' }}&gt;&#10;        &lt;Text style={{ fontSize: 12, color: '#7B8494' }}&gt;当前温度计读数（09-24）&lt;/Text&gt;&#10;        &lt;Text style={{ fontSize: 36, fontWeight: '600', color: '#2F6FED', marginTop: 2 }}&gt;33.6°&lt;/Text&gt;&#10;      &lt;/Box&gt;&#10;      &lt;Box style={{ flex: 1, background: '#FFFFFF', border: '1px solid #E5E8EE', borderRadius: 12, padding: '13px 24px' }}&gt;&#10;        &lt;Text style={{ fontSize: 12, color: '#7B8494' }}&gt;上周读数（周一 09-21）&lt;/Text&gt;&#10;        &lt;Text style={{ fontSize: 36, fontWeight: '600', color: '#4A5464', marginTop: 2 }}&gt;39.9°&lt;/Text&gt;&#10;      &lt;/Box&gt;&#10;      &lt;Box style={{ flex: 1, background: '#F1FAF3', border: '1px solid #CFE9D6', borderRadius: 12, padding: '13px 24px' }}&gt;&#10;        &lt;Text style={{ fontSize: 12, color: '#7B8494' }}&gt;边际变化（较上周一）&lt;/Text&gt;&#10;        &lt;Text style={{ fontSize: 36, fontWeight: '600', color: '#16A34A', marginTop: 2 }}&gt;−6.3° ↓ 下降&lt;/Text&gt;&#10;      &lt;/Box&gt;&#10;    &lt;/Box&gt;&#10;&#10;    &lt;Box style={{ marginTop: 12, background: '#FFFFFF', border: '1px solid #E5E8EE', borderRadius: 12, padding: '10px 12px', display: 'flex', justifyContent: 'center', alignItems: 'center' }}&gt;&#10;      &lt;Image src=&quot;assets/p1_temp_tmt.png&quot; style={{ width: 1027, height: 400 }} /&gt;&#10;    &lt;/Box&gt;&#10;&#10;    &lt;Box style={{ marginTop: 8, background: '#EFF4FE', borderRadius: 10, padding: '8px 18px' }}&gt;&#10;      &lt;Text style={{ fontSize: 12.5, color: '#1A1D26', lineHeight: 1.5 }}&gt;&#10;        &lt;Text style={{ fontWeight: '600', color: '#1F3A6E' }}&gt;本周解读：&lt;/Text&gt;温度计较上周一回落 6.3°，当前 33.6° 已跌破 40° 低温触发区；回落主要由「行业拥挤度」（59.0→41.3，−17.7pt）与「250日月跌幅均指滚动百分位」（36.5→22.0，−14.5pt）两项得分走低拖累，10 个因子中 8 项下滑。温度计为 10 因子等权合成，对比区间 2026-09-21 → 2026-09-24。&#10;      &lt;/Text&gt;&#10;    &lt;/Box&gt;&#10;  &lt;/Box&gt;&#10;&#10;  &lt;Box style={{ position: 'absolute', left: 0, right: 0, bottom: 0, height: 30, background: '#1F3A6E', display: 'flex', alignItems: 'center', justifyContent: 'flex-end', padding: '0 40px' }}&gt;&#10;    &lt;Text style={{ fontSize: 11, color: 'rgba(255,255,255,0.8)' }}&gt;01 / 02&lt;/Text&gt;&#10;  &lt;/Box&gt;&#10;&#10;&lt;/Slide&gt;&#10;"/>
         <p:cNvGrpSpPr/>
         <p:nvPr/>
       </p:nvGrpSpPr>
@@ -559,12 +559,12 @@
       </p:grpSpPr>
       <p:sp>
         <p:nvSpPr>
-          <p:cNvPr id="2" name=""/>
+          <p:cNvPr id="2" name="矩形 1"/>
           <p:cNvSpPr/>
           <p:nvPr/>
         </p:nvSpPr>
         <p:spPr>
-          <a:xfrm rot="0" flipH="0" flipV="0">
+          <a:xfrm>
             <a:off x="0" y="0"/>
             <a:ext cx="12192000" cy="6858000"/>
           </a:xfrm>
@@ -574,7 +574,6 @@
           <a:solidFill>
             <a:srgbClr val="F4F6F9"/>
           </a:solidFill>
-          <a:ln/>
         </p:spPr>
         <p:txBody>
           <a:bodyPr/>
@@ -583,12 +582,12 @@
       </p:sp>
       <p:sp>
         <p:nvSpPr>
-          <p:cNvPr id="3" name=""/>
+          <p:cNvPr id="3" name="矩形 2"/>
           <p:cNvSpPr/>
           <p:nvPr/>
         </p:nvSpPr>
         <p:spPr>
-          <a:xfrm rot="0" flipH="0" flipV="0">
+          <a:xfrm>
             <a:off x="0" y="0"/>
             <a:ext cx="12192000" cy="838200"/>
           </a:xfrm>
@@ -598,7 +597,6 @@
           <a:solidFill>
             <a:srgbClr val="1F3A6E"/>
           </a:solidFill>
-          <a:ln/>
         </p:spPr>
         <p:txBody>
           <a:bodyPr/>
@@ -607,16 +605,18 @@
       </p:sp>
       <p:sp>
         <p:nvSpPr>
-          <p:cNvPr id="4" name="" descr="{&quot;isTemplate&quot;:true,&quot;type&quot;:&quot;text&quot;}"/>
+          <p:cNvPr id="4" name="文本框 3" descr="{&quot;isTemplate&quot;:true,&quot;type&quot;:&quot;text&quot;}"/>
           <p:cNvSpPr txBox="1"/>
           <p:nvPr/>
         </p:nvSpPr>
         <p:spPr>
-          <a:xfrm rot="0" flipH="0" flipV="0">
+          <a:xfrm>
             <a:off x="381000" y="180975"/>
             <a:ext cx="4200525" cy="285750"/>
           </a:xfrm>
-          <a:prstGeom prst="rect"/>
+          <a:prstGeom prst="rect">
+            <a:avLst/>
+          </a:prstGeom>
         </p:spPr>
         <p:txBody>
           <a:bodyPr wrap="none" lIns="0" tIns="0" rIns="0" bIns="0"/>
@@ -631,27 +631,45 @@
                 <a:solidFill>
                   <a:srgbClr val="FFFFFF"/>
                 </a:solidFill>
-                <a:latin typeface="PingFang SC"/>
-                <a:ea typeface="PingFang SC"/>
-              </a:rPr>
-              <a:t>科技温度计周报｜市场情绪监测</a:t>
-            </a:r>
-            <a:endParaRPr/>
+                <a:latin typeface="PingFang SC" panose="020B0400000000000000" charset="-122"/>
+                <a:ea typeface="PingFang SC" panose="020B0400000000000000" charset="-122"/>
+              </a:rPr>
+              <a:t>科技温度计周度</a:t>
+            </a:r>
+            <a:r>
+              <a:rPr lang="zh-CN" sz="1875" b="1">
+                <a:solidFill>
+                  <a:srgbClr val="FFFFFF"/>
+                </a:solidFill>
+                <a:latin typeface="PingFang SC" panose="020B0400000000000000" charset="-122"/>
+                <a:ea typeface="PingFang SC" panose="020B0400000000000000" charset="-122"/>
+              </a:rPr>
+              <a:t>简报</a:t>
+            </a:r>
+            <a:endParaRPr lang="zh-CN" sz="1875" b="1">
+              <a:solidFill>
+                <a:srgbClr val="FFFFFF"/>
+              </a:solidFill>
+              <a:latin typeface="PingFang SC" panose="020B0400000000000000" charset="-122"/>
+              <a:ea typeface="PingFang SC" panose="020B0400000000000000" charset="-122"/>
+            </a:endParaRPr>
           </a:p>
         </p:txBody>
       </p:sp>
       <p:sp>
         <p:nvSpPr>
-          <p:cNvPr id="5" name="" descr="{&quot;isTemplate&quot;:true,&quot;type&quot;:&quot;text&quot;}"/>
+          <p:cNvPr id="5" name="文本框 4" descr="{&quot;isTemplate&quot;:true,&quot;type&quot;:&quot;text&quot;}"/>
           <p:cNvSpPr txBox="1"/>
           <p:nvPr/>
         </p:nvSpPr>
         <p:spPr>
-          <a:xfrm rot="0" flipH="0" flipV="0">
+          <a:xfrm>
             <a:off x="381000" y="514350"/>
             <a:ext cx="4200525" cy="142875"/>
           </a:xfrm>
-          <a:prstGeom prst="rect"/>
+          <a:prstGeom prst="rect">
+            <a:avLst/>
+          </a:prstGeom>
         </p:spPr>
         <p:txBody>
           <a:bodyPr wrap="none" lIns="0" tIns="0" rIns="0" bIns="0"/>
@@ -668,8 +686,8 @@
                     <a:alpha val="75000"/>
                   </a:srgbClr>
                 </a:solidFill>
-                <a:latin typeface="PingFang SC"/>
-                <a:ea typeface="PingFang SC"/>
+                <a:latin typeface="PingFang SC" panose="020B0400000000000000" charset="-122"/>
+                <a:ea typeface="PingFang SC" panose="020B0400000000000000" charset="-122"/>
               </a:rPr>
               <a:t>信号源：科技温度计　</a:t>
             </a:r>
@@ -680,8 +698,8 @@
                     <a:alpha val="75000"/>
                   </a:srgbClr>
                 </a:solidFill>
-                <a:latin typeface="PingFang SC"/>
-                <a:ea typeface="PingFang SC"/>
+                <a:latin typeface="PingFang SC" panose="020B0400000000000000" charset="-122"/>
+                <a:ea typeface="PingFang SC" panose="020B0400000000000000" charset="-122"/>
               </a:rPr>
               <a:t>|</a:t>
             </a:r>
@@ -692,8 +710,8 @@
                     <a:alpha val="75000"/>
                   </a:srgbClr>
                 </a:solidFill>
-                <a:latin typeface="PingFang SC"/>
-                <a:ea typeface="PingFang SC"/>
+                <a:latin typeface="PingFang SC" panose="020B0400000000000000" charset="-122"/>
+                <a:ea typeface="PingFang SC" panose="020B0400000000000000" charset="-122"/>
               </a:rPr>
               <a:t>　标的：产业趋势组合（模拟）　</a:t>
             </a:r>
@@ -704,8 +722,8 @@
                     <a:alpha val="75000"/>
                   </a:srgbClr>
                 </a:solidFill>
-                <a:latin typeface="PingFang SC"/>
-                <a:ea typeface="PingFang SC"/>
+                <a:latin typeface="PingFang SC" panose="020B0400000000000000" charset="-122"/>
+                <a:ea typeface="PingFang SC" panose="020B0400000000000000" charset="-122"/>
               </a:rPr>
               <a:t>|</a:t>
             </a:r>
@@ -716,8 +734,8 @@
                     <a:alpha val="75000"/>
                   </a:srgbClr>
                 </a:solidFill>
-                <a:latin typeface="PingFang SC"/>
-                <a:ea typeface="PingFang SC"/>
+                <a:latin typeface="PingFang SC" panose="020B0400000000000000" charset="-122"/>
+                <a:ea typeface="PingFang SC" panose="020B0400000000000000" charset="-122"/>
               </a:rPr>
               <a:t>　数据截至</a:t>
             </a:r>
@@ -728,27 +746,37 @@
                     <a:alpha val="75000"/>
                   </a:srgbClr>
                 </a:solidFill>
-                <a:latin typeface="PingFang SC"/>
-                <a:ea typeface="PingFang SC"/>
-              </a:rPr>
-              <a:t xml:space="preserve"> 2026-09-22</a:t>
-            </a:r>
-            <a:endParaRPr/>
+                <a:latin typeface="PingFang SC" panose="020B0400000000000000" charset="-122"/>
+                <a:ea typeface="PingFang SC" panose="020B0400000000000000" charset="-122"/>
+              </a:rPr>
+              <a:t> 2026-09-24</a:t>
+            </a:r>
+            <a:endParaRPr lang="en-US" sz="900">
+              <a:solidFill>
+                <a:srgbClr val="FFFFFF">
+                  <a:alpha val="75000"/>
+                </a:srgbClr>
+              </a:solidFill>
+              <a:latin typeface="PingFang SC" panose="020B0400000000000000" charset="-122"/>
+              <a:ea typeface="PingFang SC" panose="020B0400000000000000" charset="-122"/>
+            </a:endParaRPr>
           </a:p>
         </p:txBody>
       </p:sp>
       <p:sp>
         <p:nvSpPr>
-          <p:cNvPr id="6" name="" descr="{&quot;isTemplate&quot;:true,&quot;type&quot;:&quot;text&quot;}"/>
+          <p:cNvPr id="6" name="文本框 5" descr="{&quot;isTemplate&quot;:true,&quot;type&quot;:&quot;text&quot;}"/>
           <p:cNvSpPr txBox="1"/>
           <p:nvPr/>
         </p:nvSpPr>
         <p:spPr>
-          <a:xfrm rot="0" flipH="0" flipV="0">
+          <a:xfrm>
             <a:off x="10868025" y="342900"/>
             <a:ext cx="942975" cy="152400"/>
           </a:xfrm>
-          <a:prstGeom prst="rect"/>
+          <a:prstGeom prst="rect">
+            <a:avLst/>
+          </a:prstGeom>
         </p:spPr>
         <p:txBody>
           <a:bodyPr wrap="none" lIns="0" tIns="0" rIns="0" bIns="0"/>
@@ -765,10 +793,10 @@
                     <a:alpha val="85000"/>
                   </a:srgbClr>
                 </a:solidFill>
-                <a:latin typeface="PingFang SC"/>
-                <a:ea typeface="PingFang SC"/>
-              </a:rPr>
-              <a:t xml:space="preserve">2026 </a:t>
+                <a:latin typeface="PingFang SC" panose="020B0400000000000000" charset="-122"/>
+                <a:ea typeface="PingFang SC" panose="020B0400000000000000" charset="-122"/>
+              </a:rPr>
+              <a:t>2026 </a:t>
             </a:r>
             <a:r>
               <a:rPr lang="zh-CN" sz="975">
@@ -777,8 +805,8 @@
                     <a:alpha val="85000"/>
                   </a:srgbClr>
                 </a:solidFill>
-                <a:latin typeface="PingFang SC"/>
-                <a:ea typeface="PingFang SC"/>
+                <a:latin typeface="PingFang SC" panose="020B0400000000000000" charset="-122"/>
+                <a:ea typeface="PingFang SC" panose="020B0400000000000000" charset="-122"/>
               </a:rPr>
               <a:t>年第</a:t>
             </a:r>
@@ -789,10 +817,10 @@
                     <a:alpha val="85000"/>
                   </a:srgbClr>
                 </a:solidFill>
-                <a:latin typeface="PingFang SC"/>
-                <a:ea typeface="PingFang SC"/>
-              </a:rPr>
-              <a:t xml:space="preserve"> 39 </a:t>
+                <a:latin typeface="PingFang SC" panose="020B0400000000000000" charset="-122"/>
+                <a:ea typeface="PingFang SC" panose="020B0400000000000000" charset="-122"/>
+              </a:rPr>
+              <a:t> 40 </a:t>
             </a:r>
             <a:r>
               <a:rPr lang="zh-CN" sz="975">
@@ -801,29 +829,37 @@
                     <a:alpha val="85000"/>
                   </a:srgbClr>
                 </a:solidFill>
-                <a:latin typeface="PingFang SC"/>
-                <a:ea typeface="PingFang SC"/>
+                <a:latin typeface="PingFang SC" panose="020B0400000000000000" charset="-122"/>
+                <a:ea typeface="PingFang SC" panose="020B0400000000000000" charset="-122"/>
               </a:rPr>
               <a:t>周</a:t>
             </a:r>
-            <a:endParaRPr/>
+            <a:endParaRPr lang="zh-CN" sz="975">
+              <a:solidFill>
+                <a:srgbClr val="FFFFFF">
+                  <a:alpha val="85000"/>
+                </a:srgbClr>
+              </a:solidFill>
+              <a:latin typeface="PingFang SC" panose="020B0400000000000000" charset="-122"/>
+              <a:ea typeface="PingFang SC" panose="020B0400000000000000" charset="-122"/>
+            </a:endParaRPr>
           </a:p>
         </p:txBody>
       </p:sp>
       <p:sp>
         <p:nvSpPr>
-          <p:cNvPr id="7" name=""/>
+          <p:cNvPr id="7" name="圆角矩形 6"/>
           <p:cNvSpPr/>
           <p:nvPr/>
         </p:nvSpPr>
         <p:spPr>
-          <a:xfrm rot="0" flipH="0" flipV="0">
+          <a:xfrm>
             <a:off x="381000" y="971550"/>
-            <a:ext cx="2657475" cy="819150"/>
+            <a:ext cx="3705225" cy="838200"/>
           </a:xfrm>
           <a:prstGeom prst="roundRect">
             <a:avLst>
-              <a:gd name="adj" fmla="val 13953"/>
+              <a:gd name="adj" fmla="val 13636"/>
             </a:avLst>
           </a:prstGeom>
           <a:solidFill>
@@ -843,16 +879,18 @@
       </p:sp>
       <p:sp>
         <p:nvSpPr>
-          <p:cNvPr id="8" name="" descr="{&quot;isTemplate&quot;:true,&quot;type&quot;:&quot;text&quot;}"/>
+          <p:cNvPr id="8" name="文本框 7" descr="{&quot;isTemplate&quot;:true,&quot;type&quot;:&quot;text&quot;}"/>
           <p:cNvSpPr txBox="1"/>
           <p:nvPr/>
         </p:nvSpPr>
         <p:spPr>
-          <a:xfrm rot="0" flipH="0" flipV="0">
-            <a:off x="571500" y="1085850"/>
-            <a:ext cx="2276475" cy="142875"/>
+          <a:xfrm>
+            <a:off x="609600" y="1095375"/>
+            <a:ext cx="3248025" cy="142875"/>
           </a:xfrm>
-          <a:prstGeom prst="rect"/>
+          <a:prstGeom prst="rect">
+            <a:avLst/>
+          </a:prstGeom>
         </p:spPr>
         <p:txBody>
           <a:bodyPr wrap="none" lIns="0" tIns="0" rIns="0" bIns="0"/>
@@ -867,8 +905,8 @@
                 <a:solidFill>
                   <a:srgbClr val="7B8494"/>
                 </a:solidFill>
-                <a:latin typeface="PingFang SC"/>
-                <a:ea typeface="PingFang SC"/>
+                <a:latin typeface="PingFang SC" panose="020B0400000000000000" charset="-122"/>
+                <a:ea typeface="PingFang SC" panose="020B0400000000000000" charset="-122"/>
               </a:rPr>
               <a:t>当前温度计读数（</a:t>
             </a:r>
@@ -877,37 +915,45 @@
                 <a:solidFill>
                   <a:srgbClr val="7B8494"/>
                 </a:solidFill>
-                <a:latin typeface="PingFang SC"/>
-                <a:ea typeface="PingFang SC"/>
-              </a:rPr>
-              <a:t>09-22</a:t>
+                <a:latin typeface="PingFang SC" panose="020B0400000000000000" charset="-122"/>
+                <a:ea typeface="PingFang SC" panose="020B0400000000000000" charset="-122"/>
+              </a:rPr>
+              <a:t>09-24</a:t>
             </a:r>
             <a:r>
               <a:rPr lang="zh-CN" sz="900">
                 <a:solidFill>
                   <a:srgbClr val="7B8494"/>
                 </a:solidFill>
-                <a:latin typeface="PingFang SC"/>
-                <a:ea typeface="PingFang SC"/>
+                <a:latin typeface="PingFang SC" panose="020B0400000000000000" charset="-122"/>
+                <a:ea typeface="PingFang SC" panose="020B0400000000000000" charset="-122"/>
               </a:rPr>
               <a:t>）</a:t>
             </a:r>
-            <a:endParaRPr/>
+            <a:endParaRPr lang="zh-CN" sz="900">
+              <a:solidFill>
+                <a:srgbClr val="7B8494"/>
+              </a:solidFill>
+              <a:latin typeface="PingFang SC" panose="020B0400000000000000" charset="-122"/>
+              <a:ea typeface="PingFang SC" panose="020B0400000000000000" charset="-122"/>
+            </a:endParaRPr>
           </a:p>
         </p:txBody>
       </p:sp>
       <p:sp>
         <p:nvSpPr>
-          <p:cNvPr id="9" name="" descr="{&quot;isTemplate&quot;:true,&quot;type&quot;:&quot;text&quot;}"/>
+          <p:cNvPr id="9" name="文本框 8" descr="{&quot;isTemplate&quot;:true,&quot;type&quot;:&quot;text&quot;}"/>
           <p:cNvSpPr txBox="1"/>
           <p:nvPr/>
         </p:nvSpPr>
         <p:spPr>
-          <a:xfrm rot="0" flipH="0" flipV="0">
-            <a:off x="571500" y="1247775"/>
-            <a:ext cx="2276475" cy="390525"/>
+          <a:xfrm>
+            <a:off x="609600" y="1257300"/>
+            <a:ext cx="3248025" cy="419100"/>
           </a:xfrm>
-          <a:prstGeom prst="rect"/>
+          <a:prstGeom prst="rect">
+            <a:avLst/>
+          </a:prstGeom>
         </p:spPr>
         <p:txBody>
           <a:bodyPr wrap="none" lIns="0" tIns="0" rIns="0" bIns="0"/>
@@ -918,33 +964,39 @@
               </a:lnSpc>
             </a:pPr>
             <a:r>
-              <a:rPr lang="en-US" sz="2550" b="1">
+              <a:rPr lang="en-US" sz="2700" b="1">
                 <a:solidFill>
                   <a:srgbClr val="2F6FED"/>
                 </a:solidFill>
-                <a:latin typeface="PingFang SC"/>
-                <a:ea typeface="PingFang SC"/>
-              </a:rPr>
-              <a:t>41.8°</a:t>
-            </a:r>
-            <a:endParaRPr/>
+                <a:latin typeface="PingFang SC" panose="020B0400000000000000" charset="-122"/>
+                <a:ea typeface="PingFang SC" panose="020B0400000000000000" charset="-122"/>
+              </a:rPr>
+              <a:t>33.6°</a:t>
+            </a:r>
+            <a:endParaRPr lang="en-US" sz="2700" b="1">
+              <a:solidFill>
+                <a:srgbClr val="2F6FED"/>
+              </a:solidFill>
+              <a:latin typeface="PingFang SC" panose="020B0400000000000000" charset="-122"/>
+              <a:ea typeface="PingFang SC" panose="020B0400000000000000" charset="-122"/>
+            </a:endParaRPr>
           </a:p>
         </p:txBody>
       </p:sp>
       <p:sp>
         <p:nvSpPr>
-          <p:cNvPr id="10" name=""/>
+          <p:cNvPr id="10" name="圆角矩形 9"/>
           <p:cNvSpPr/>
           <p:nvPr/>
         </p:nvSpPr>
         <p:spPr>
-          <a:xfrm rot="0" flipH="0" flipV="0">
-            <a:off x="3171825" y="971550"/>
-            <a:ext cx="2657475" cy="819150"/>
+          <a:xfrm>
+            <a:off x="4238625" y="971550"/>
+            <a:ext cx="3714750" cy="838200"/>
           </a:xfrm>
           <a:prstGeom prst="roundRect">
             <a:avLst>
-              <a:gd name="adj" fmla="val 13953"/>
+              <a:gd name="adj" fmla="val 13636"/>
             </a:avLst>
           </a:prstGeom>
           <a:solidFill>
@@ -964,16 +1016,18 @@
       </p:sp>
       <p:sp>
         <p:nvSpPr>
-          <p:cNvPr id="11" name="" descr="{&quot;isTemplate&quot;:true,&quot;type&quot;:&quot;text&quot;}"/>
+          <p:cNvPr id="11" name="文本框 10" descr="{&quot;isTemplate&quot;:true,&quot;type&quot;:&quot;text&quot;}"/>
           <p:cNvSpPr txBox="1"/>
           <p:nvPr/>
         </p:nvSpPr>
         <p:spPr>
-          <a:xfrm rot="0" flipH="0" flipV="0">
-            <a:off x="3362325" y="1085850"/>
-            <a:ext cx="2276475" cy="142875"/>
+          <a:xfrm>
+            <a:off x="4467225" y="1095375"/>
+            <a:ext cx="3257550" cy="142875"/>
           </a:xfrm>
-          <a:prstGeom prst="rect"/>
+          <a:prstGeom prst="rect">
+            <a:avLst/>
+          </a:prstGeom>
         </p:spPr>
         <p:txBody>
           <a:bodyPr wrap="none" lIns="0" tIns="0" rIns="0" bIns="0"/>
@@ -988,47 +1042,55 @@
                 <a:solidFill>
                   <a:srgbClr val="7B8494"/>
                 </a:solidFill>
-                <a:latin typeface="PingFang SC"/>
-                <a:ea typeface="PingFang SC"/>
-              </a:rPr>
-              <a:t>上周五读数（</a:t>
+                <a:latin typeface="PingFang SC" panose="020B0400000000000000" charset="-122"/>
+                <a:ea typeface="PingFang SC" panose="020B0400000000000000" charset="-122"/>
+              </a:rPr>
+              <a:t>上周读数（</a:t>
             </a:r>
             <a:r>
               <a:rPr lang="en-US" sz="900">
                 <a:solidFill>
                   <a:srgbClr val="7B8494"/>
                 </a:solidFill>
-                <a:latin typeface="PingFang SC"/>
-                <a:ea typeface="PingFang SC"/>
-              </a:rPr>
-              <a:t>09-18</a:t>
+                <a:latin typeface="PingFang SC" panose="020B0400000000000000" charset="-122"/>
+                <a:ea typeface="PingFang SC" panose="020B0400000000000000" charset="-122"/>
+              </a:rPr>
+              <a:t>09-21</a:t>
             </a:r>
             <a:r>
               <a:rPr lang="zh-CN" sz="900">
                 <a:solidFill>
                   <a:srgbClr val="7B8494"/>
                 </a:solidFill>
-                <a:latin typeface="PingFang SC"/>
-                <a:ea typeface="PingFang SC"/>
+                <a:latin typeface="PingFang SC" panose="020B0400000000000000" charset="-122"/>
+                <a:ea typeface="PingFang SC" panose="020B0400000000000000" charset="-122"/>
               </a:rPr>
               <a:t>）</a:t>
             </a:r>
-            <a:endParaRPr/>
+            <a:endParaRPr lang="zh-CN" sz="900">
+              <a:solidFill>
+                <a:srgbClr val="7B8494"/>
+              </a:solidFill>
+              <a:latin typeface="PingFang SC" panose="020B0400000000000000" charset="-122"/>
+              <a:ea typeface="PingFang SC" panose="020B0400000000000000" charset="-122"/>
+            </a:endParaRPr>
           </a:p>
         </p:txBody>
       </p:sp>
       <p:sp>
         <p:nvSpPr>
-          <p:cNvPr id="12" name="" descr="{&quot;isTemplate&quot;:true,&quot;type&quot;:&quot;text&quot;}"/>
+          <p:cNvPr id="12" name="文本框 11" descr="{&quot;isTemplate&quot;:true,&quot;type&quot;:&quot;text&quot;}"/>
           <p:cNvSpPr txBox="1"/>
           <p:nvPr/>
         </p:nvSpPr>
         <p:spPr>
-          <a:xfrm rot="0" flipH="0" flipV="0">
-            <a:off x="3362325" y="1247775"/>
-            <a:ext cx="2276475" cy="390525"/>
+          <a:xfrm>
+            <a:off x="4467225" y="1257300"/>
+            <a:ext cx="3257550" cy="419100"/>
           </a:xfrm>
-          <a:prstGeom prst="rect"/>
+          <a:prstGeom prst="rect">
+            <a:avLst/>
+          </a:prstGeom>
         </p:spPr>
         <p:txBody>
           <a:bodyPr wrap="none" lIns="0" tIns="0" rIns="0" bIns="0"/>
@@ -1039,41 +1101,47 @@
               </a:lnSpc>
             </a:pPr>
             <a:r>
-              <a:rPr lang="en-US" sz="2550" b="1">
+              <a:rPr lang="en-US" sz="2700" b="1">
                 <a:solidFill>
                   <a:srgbClr val="4A5464"/>
                 </a:solidFill>
-                <a:latin typeface="PingFang SC"/>
-                <a:ea typeface="PingFang SC"/>
-              </a:rPr>
-              <a:t>40.4°</a:t>
-            </a:r>
-            <a:endParaRPr/>
+                <a:latin typeface="PingFang SC" panose="020B0400000000000000" charset="-122"/>
+                <a:ea typeface="PingFang SC" panose="020B0400000000000000" charset="-122"/>
+              </a:rPr>
+              <a:t>39.9°</a:t>
+            </a:r>
+            <a:endParaRPr lang="en-US" sz="2700" b="1">
+              <a:solidFill>
+                <a:srgbClr val="4A5464"/>
+              </a:solidFill>
+              <a:latin typeface="PingFang SC" panose="020B0400000000000000" charset="-122"/>
+              <a:ea typeface="PingFang SC" panose="020B0400000000000000" charset="-122"/>
+            </a:endParaRPr>
           </a:p>
         </p:txBody>
       </p:sp>
       <p:sp>
         <p:nvSpPr>
-          <p:cNvPr id="13" name=""/>
+          <p:cNvPr id="13" name="圆角矩形 12"/>
           <p:cNvSpPr/>
           <p:nvPr/>
         </p:nvSpPr>
         <p:spPr>
-          <a:xfrm rot="0" flipH="0" flipV="0">
-            <a:off x="5962650" y="971550"/>
-            <a:ext cx="2657475" cy="819150"/>
+          <a:xfrm>
+            <a:off x="8105775" y="971550"/>
+            <a:ext cx="3705225" cy="838200"/>
           </a:xfrm>
           <a:prstGeom prst="roundRect">
             <a:avLst>
-              <a:gd name="adj" fmla="val 13953"/>
+              <a:gd name="adj" fmla="val 13636"/>
             </a:avLst>
           </a:prstGeom>
           <a:solidFill>
-            <a:srgbClr val="FFF7F7"/>
+            <a:srgbClr val="F1FAF3"/>
           </a:solidFill>
           <a:ln w="12700">
             <a:solidFill>
-              <a:srgbClr val="F2D4D4"/>
+              <a:srgbClr val="CFE9D6"/>
             </a:solidFill>
             <a:prstDash val="solid"/>
           </a:ln>
@@ -1085,16 +1153,18 @@
       </p:sp>
       <p:sp>
         <p:nvSpPr>
-          <p:cNvPr id="14" name="" descr="{&quot;isTemplate&quot;:true,&quot;type&quot;:&quot;text&quot;}"/>
+          <p:cNvPr id="14" name="文本框 13" descr="{&quot;isTemplate&quot;:true,&quot;type&quot;:&quot;text&quot;}"/>
           <p:cNvSpPr txBox="1"/>
           <p:nvPr/>
         </p:nvSpPr>
         <p:spPr>
-          <a:xfrm rot="0" flipH="0" flipV="0">
-            <a:off x="6153150" y="1085850"/>
-            <a:ext cx="2276475" cy="142875"/>
+          <a:xfrm>
+            <a:off x="8334375" y="1095375"/>
+            <a:ext cx="3248025" cy="142875"/>
           </a:xfrm>
-          <a:prstGeom prst="rect"/>
+          <a:prstGeom prst="rect">
+            <a:avLst/>
+          </a:prstGeom>
         </p:spPr>
         <p:txBody>
           <a:bodyPr wrap="none" lIns="0" tIns="0" rIns="0" bIns="0"/>
@@ -1109,27 +1179,35 @@
                 <a:solidFill>
                   <a:srgbClr val="7B8494"/>
                 </a:solidFill>
-                <a:latin typeface="PingFang SC"/>
-                <a:ea typeface="PingFang SC"/>
-              </a:rPr>
-              <a:t>边际变化（较上周五）</a:t>
-            </a:r>
-            <a:endParaRPr/>
+                <a:latin typeface="PingFang SC" panose="020B0400000000000000" charset="-122"/>
+                <a:ea typeface="PingFang SC" panose="020B0400000000000000" charset="-122"/>
+              </a:rPr>
+              <a:t>边际变化（较上周一）</a:t>
+            </a:r>
+            <a:endParaRPr lang="zh-CN" sz="900">
+              <a:solidFill>
+                <a:srgbClr val="7B8494"/>
+              </a:solidFill>
+              <a:latin typeface="PingFang SC" panose="020B0400000000000000" charset="-122"/>
+              <a:ea typeface="PingFang SC" panose="020B0400000000000000" charset="-122"/>
+            </a:endParaRPr>
           </a:p>
         </p:txBody>
       </p:sp>
       <p:sp>
         <p:nvSpPr>
-          <p:cNvPr id="15" name="" descr="{&quot;isTemplate&quot;:true,&quot;type&quot;:&quot;text&quot;}"/>
+          <p:cNvPr id="15" name="文本框 14" descr="{&quot;isTemplate&quot;:true,&quot;type&quot;:&quot;text&quot;}"/>
           <p:cNvSpPr txBox="1"/>
           <p:nvPr/>
         </p:nvSpPr>
         <p:spPr>
-          <a:xfrm rot="0" flipH="0" flipV="0">
-            <a:off x="6153150" y="1247775"/>
-            <a:ext cx="2276475" cy="390525"/>
+          <a:xfrm>
+            <a:off x="8334375" y="1257300"/>
+            <a:ext cx="3248025" cy="419100"/>
           </a:xfrm>
-          <a:prstGeom prst="rect"/>
+          <a:prstGeom prst="rect">
+            <a:avLst/>
+          </a:prstGeom>
         </p:spPr>
         <p:txBody>
           <a:bodyPr wrap="none" lIns="0" tIns="0" rIns="0" bIns="0"/>
@@ -1140,239 +1218,49 @@
               </a:lnSpc>
             </a:pPr>
             <a:r>
-              <a:rPr lang="en-US" sz="2550" b="1">
-                <a:solidFill>
-                  <a:srgbClr val="D93636"/>
-                </a:solidFill>
-                <a:latin typeface="PingFang SC"/>
-                <a:ea typeface="PingFang SC"/>
-              </a:rPr>
-              <a:t xml:space="preserve">+1.4° ↑ </a:t>
-            </a:r>
-            <a:r>
-              <a:rPr lang="zh-CN" sz="2550" b="1">
-                <a:solidFill>
-                  <a:srgbClr val="D93636"/>
-                </a:solidFill>
-                <a:latin typeface="PingFang SC"/>
-                <a:ea typeface="PingFang SC"/>
-              </a:rPr>
-              <a:t>回升</a:t>
-            </a:r>
-            <a:endParaRPr/>
+              <a:rPr lang="en-US" sz="2700" b="1">
+                <a:solidFill>
+                  <a:srgbClr val="16A34A"/>
+                </a:solidFill>
+                <a:latin typeface="PingFang SC" panose="020B0400000000000000" charset="-122"/>
+                <a:ea typeface="PingFang SC" panose="020B0400000000000000" charset="-122"/>
+              </a:rPr>
+              <a:t>−6.3° ↓ </a:t>
+            </a:r>
+            <a:r>
+              <a:rPr lang="zh-CN" sz="2700" b="1">
+                <a:solidFill>
+                  <a:srgbClr val="16A34A"/>
+                </a:solidFill>
+                <a:latin typeface="PingFang SC" panose="020B0400000000000000" charset="-122"/>
+                <a:ea typeface="PingFang SC" panose="020B0400000000000000" charset="-122"/>
+              </a:rPr>
+              <a:t>下降</a:t>
+            </a:r>
+            <a:endParaRPr lang="zh-CN" sz="2700" b="1">
+              <a:solidFill>
+                <a:srgbClr val="16A34A"/>
+              </a:solidFill>
+              <a:latin typeface="PingFang SC" panose="020B0400000000000000" charset="-122"/>
+              <a:ea typeface="PingFang SC" panose="020B0400000000000000" charset="-122"/>
+            </a:endParaRPr>
           </a:p>
         </p:txBody>
       </p:sp>
       <p:sp>
         <p:nvSpPr>
-          <p:cNvPr id="16" name=""/>
+          <p:cNvPr id="16" name="圆角矩形 15"/>
           <p:cNvSpPr/>
           <p:nvPr/>
         </p:nvSpPr>
         <p:spPr>
-          <a:xfrm rot="0" flipH="0" flipV="0">
-            <a:off x="8753475" y="971550"/>
-            <a:ext cx="3057525" cy="819150"/>
+          <a:xfrm>
+            <a:off x="381000" y="1924050"/>
+            <a:ext cx="11430000" cy="4000500"/>
           </a:xfrm>
           <a:prstGeom prst="roundRect">
             <a:avLst>
-              <a:gd name="adj" fmla="val 13953"/>
-            </a:avLst>
-          </a:prstGeom>
-          <a:solidFill>
-            <a:srgbClr val="FFFFFF"/>
-          </a:solidFill>
-          <a:ln w="12700">
-            <a:solidFill>
-              <a:srgbClr val="E5E8EE"/>
-            </a:solidFill>
-            <a:prstDash val="solid"/>
-          </a:ln>
-        </p:spPr>
-        <p:txBody>
-          <a:bodyPr/>
-          <a:p/>
-        </p:txBody>
-      </p:sp>
-      <p:sp>
-        <p:nvSpPr>
-          <p:cNvPr id="17" name="" descr="{&quot;isTemplate&quot;:true,&quot;type&quot;:&quot;text&quot;}"/>
-          <p:cNvSpPr txBox="1"/>
-          <p:nvPr/>
-        </p:nvSpPr>
-        <p:spPr>
-          <a:xfrm rot="0" flipH="0" flipV="0">
-            <a:off x="8943975" y="1085850"/>
-            <a:ext cx="2676525" cy="142875"/>
-          </a:xfrm>
-          <a:prstGeom prst="rect"/>
-        </p:spPr>
-        <p:txBody>
-          <a:bodyPr wrap="none" lIns="0" tIns="0" rIns="0" bIns="0"/>
-          <a:p>
-            <a:pPr>
-              <a:lnSpc>
-                <a:spcPct val="100000"/>
-              </a:lnSpc>
-            </a:pPr>
-            <a:r>
-              <a:rPr lang="zh-CN" sz="900">
-                <a:solidFill>
-                  <a:srgbClr val="7B8494"/>
-                </a:solidFill>
-                <a:latin typeface="PingFang SC"/>
-                <a:ea typeface="PingFang SC"/>
-              </a:rPr>
-              <a:t>所处区间（</a:t>
-            </a:r>
-            <a:r>
-              <a:rPr lang="en-US" sz="900">
-                <a:solidFill>
-                  <a:srgbClr val="7B8494"/>
-                </a:solidFill>
-                <a:latin typeface="PingFang SC"/>
-                <a:ea typeface="PingFang SC"/>
-              </a:rPr>
-              <a:t xml:space="preserve">40° </a:t>
-            </a:r>
-            <a:r>
-              <a:rPr lang="zh-CN" sz="900">
-                <a:solidFill>
-                  <a:srgbClr val="7B8494"/>
-                </a:solidFill>
-                <a:latin typeface="PingFang SC"/>
-                <a:ea typeface="PingFang SC"/>
-              </a:rPr>
-              <a:t>为低温阈值）</a:t>
-            </a:r>
-            <a:endParaRPr/>
-          </a:p>
-        </p:txBody>
-      </p:sp>
-      <p:sp>
-        <p:nvSpPr>
-          <p:cNvPr id="18" name="" descr="{&quot;isTemplate&quot;:true,&quot;type&quot;:&quot;text&quot;}"/>
-          <p:cNvSpPr txBox="1"/>
-          <p:nvPr/>
-        </p:nvSpPr>
-        <p:spPr>
-          <a:xfrm rot="0" flipH="0" flipV="0">
-            <a:off x="8943975" y="1304925"/>
-            <a:ext cx="2676525" cy="190500"/>
-          </a:xfrm>
-          <a:prstGeom prst="rect"/>
-        </p:spPr>
-        <p:txBody>
-          <a:bodyPr wrap="none" lIns="0" tIns="0" rIns="0" bIns="0"/>
-          <a:p>
-            <a:pPr>
-              <a:lnSpc>
-                <a:spcPct val="100000"/>
-              </a:lnSpc>
-            </a:pPr>
-            <a:r>
-              <a:rPr lang="zh-CN" sz="1200" b="1">
-                <a:solidFill>
-                  <a:srgbClr val="1A1D26"/>
-                </a:solidFill>
-                <a:latin typeface="PingFang SC"/>
-                <a:ea typeface="PingFang SC"/>
-              </a:rPr>
-              <a:t>已回升至</a:t>
-            </a:r>
-            <a:r>
-              <a:rPr lang="en-US" sz="1200" b="1">
-                <a:solidFill>
-                  <a:srgbClr val="1A1D26"/>
-                </a:solidFill>
-                <a:latin typeface="PingFang SC"/>
-                <a:ea typeface="PingFang SC"/>
-              </a:rPr>
-              <a:t xml:space="preserve"> 40° </a:t>
-            </a:r>
-            <a:r>
-              <a:rPr lang="zh-CN" sz="1200" b="1">
-                <a:solidFill>
-                  <a:srgbClr val="1A1D26"/>
-                </a:solidFill>
-                <a:latin typeface="PingFang SC"/>
-                <a:ea typeface="PingFang SC"/>
-              </a:rPr>
-              <a:t>上方，脱离低温触发区</a:t>
-            </a:r>
-            <a:endParaRPr/>
-          </a:p>
-        </p:txBody>
-      </p:sp>
-      <p:sp>
-        <p:nvSpPr>
-          <p:cNvPr id="19" name="" descr="{&quot;isTemplate&quot;:true,&quot;type&quot;:&quot;text&quot;}"/>
-          <p:cNvSpPr txBox="1"/>
-          <p:nvPr/>
-        </p:nvSpPr>
-        <p:spPr>
-          <a:xfrm rot="0" flipH="0" flipV="0">
-            <a:off x="8943975" y="1514475"/>
-            <a:ext cx="2676525" cy="133350"/>
-          </a:xfrm>
-          <a:prstGeom prst="rect"/>
-        </p:spPr>
-        <p:txBody>
-          <a:bodyPr wrap="none" lIns="0" tIns="0" rIns="0" bIns="0"/>
-          <a:p>
-            <a:pPr>
-              <a:lnSpc>
-                <a:spcPct val="100000"/>
-              </a:lnSpc>
-            </a:pPr>
-            <a:r>
-              <a:rPr lang="zh-CN" sz="863">
-                <a:solidFill>
-                  <a:srgbClr val="9AA3B2"/>
-                </a:solidFill>
-                <a:latin typeface="PingFang SC"/>
-                <a:ea typeface="PingFang SC"/>
-              </a:rPr>
-              <a:t>上周五尚在触发区边缘（</a:t>
-            </a:r>
-            <a:r>
-              <a:rPr lang="en-US" sz="863">
-                <a:solidFill>
-                  <a:srgbClr val="9AA3B2"/>
-                </a:solidFill>
-                <a:latin typeface="PingFang SC"/>
-                <a:ea typeface="PingFang SC"/>
-              </a:rPr>
-              <a:t>40.4°</a:t>
-            </a:r>
-            <a:r>
-              <a:rPr lang="zh-CN" sz="863">
-                <a:solidFill>
-                  <a:srgbClr val="9AA3B2"/>
-                </a:solidFill>
-                <a:latin typeface="PingFang SC"/>
-                <a:ea typeface="PingFang SC"/>
-              </a:rPr>
-              <a:t>）</a:t>
-            </a:r>
-            <a:endParaRPr/>
-          </a:p>
-        </p:txBody>
-      </p:sp>
-      <p:sp>
-        <p:nvSpPr>
-          <p:cNvPr id="20" name=""/>
-          <p:cNvSpPr/>
-          <p:nvPr/>
-        </p:nvSpPr>
-        <p:spPr>
-          <a:xfrm rot="0" flipH="0" flipV="0">
-            <a:off x="381000" y="1905000"/>
-            <a:ext cx="11430000" cy="4162425"/>
-          </a:xfrm>
-          <a:prstGeom prst="roundRect">
-            <a:avLst>
-              <a:gd name="adj" fmla="val 2746"/>
+              <a:gd name="adj" fmla="val 2857"/>
             </a:avLst>
           </a:prstGeom>
           <a:solidFill>
@@ -1392,7 +1280,7 @@
       </p:sp>
       <p:pic>
         <p:nvPicPr>
-          <p:cNvPr id="21" name=""/>
+          <p:cNvPr id="17" name="图片 16"/>
           <p:cNvPicPr>
             <a:picLocks noChangeAspect="1"/>
           </p:cNvPicPr>
@@ -1400,42 +1288,40 @@
         </p:nvPicPr>
         <p:blipFill>
           <a:blip r:embed="rId1"/>
-          <a:srcRect l="54" t="0" r="54" b="0"/>
+          <a:srcRect l="13" r="13"/>
           <a:stretch>
             <a:fillRect/>
           </a:stretch>
         </p:blipFill>
         <p:spPr>
-          <a:xfrm rot="0" flipH="0" flipV="0">
-            <a:off x="1114425" y="2000250"/>
-            <a:ext cx="9963150" cy="3971925"/>
+          <a:xfrm>
+            <a:off x="1209675" y="2019300"/>
+            <a:ext cx="9782175" cy="3810000"/>
           </a:xfrm>
           <a:prstGeom prst="rect">
             <a:avLst/>
           </a:prstGeom>
-          <a:ln/>
         </p:spPr>
       </p:pic>
       <p:sp>
         <p:nvSpPr>
-          <p:cNvPr id="22" name=""/>
+          <p:cNvPr id="18" name="圆角矩形 17"/>
           <p:cNvSpPr/>
           <p:nvPr/>
         </p:nvSpPr>
         <p:spPr>
-          <a:xfrm rot="0" flipH="0" flipV="0">
-            <a:off x="381000" y="6143625"/>
-            <a:ext cx="11430000" cy="619125"/>
+          <a:xfrm>
+            <a:off x="381000" y="6000750"/>
+            <a:ext cx="11430000" cy="581025"/>
           </a:xfrm>
           <a:prstGeom prst="roundRect">
             <a:avLst>
-              <a:gd name="adj" fmla="val 15385"/>
+              <a:gd name="adj" fmla="val 16393"/>
             </a:avLst>
           </a:prstGeom>
           <a:solidFill>
             <a:srgbClr val="EFF4FE"/>
           </a:solidFill>
-          <a:ln/>
         </p:spPr>
         <p:txBody>
           <a:bodyPr/>
@@ -1444,259 +1330,147 @@
       </p:sp>
       <p:sp>
         <p:nvSpPr>
-          <p:cNvPr id="23" name="" descr="{&quot;isTemplate&quot;:true,&quot;type&quot;:&quot;text&quot;}"/>
+          <p:cNvPr id="19" name="文本框 18" descr="{&quot;isTemplate&quot;:true,&quot;type&quot;:&quot;text&quot;}"/>
           <p:cNvSpPr txBox="1"/>
           <p:nvPr/>
         </p:nvSpPr>
         <p:spPr>
-          <a:xfrm rot="0" flipH="0" flipV="0">
-            <a:off x="552450" y="6229350"/>
-            <a:ext cx="11087100" cy="447675"/>
+          <a:xfrm>
+            <a:off x="552450" y="6076950"/>
+            <a:ext cx="11087100" cy="428625"/>
           </a:xfrm>
-          <a:prstGeom prst="rect"/>
+          <a:prstGeom prst="rect">
+            <a:avLst/>
+          </a:prstGeom>
         </p:spPr>
         <p:txBody>
           <a:bodyPr wrap="square" lIns="0" tIns="0" rIns="0" bIns="0">
-            <a:normAutofit/>
+            <a:normAutofit lnSpcReduction="10000"/>
           </a:bodyPr>
           <a:p>
             <a:pPr>
               <a:lnSpc>
-                <a:spcPct val="155000"/>
+                <a:spcPct val="150000"/>
               </a:lnSpc>
             </a:pPr>
             <a:r>
-              <a:rPr lang="zh-CN" sz="938">
+              <a:rPr lang="zh-CN" sz="940">
                 <a:solidFill>
                   <a:srgbClr val="1A1D26"/>
                 </a:solidFill>
-                <a:latin typeface="PingFang SC"/>
-                <a:ea typeface="PingFang SC"/>
-              </a:rPr>
-              <a:t>本周解读：</a:t>
-            </a:r>
-            <a:r>
-              <a:rPr lang="zh-CN" sz="938">
+                <a:latin typeface="PingFang SC" panose="020B0400000000000000" charset="-122"/>
+                <a:ea typeface="PingFang SC" panose="020B0400000000000000" charset="-122"/>
+              </a:rPr>
+              <a:t>本周解读：温度计较上周一回落</a:t>
+            </a:r>
+            <a:r>
+              <a:rPr lang="en-US" sz="940">
                 <a:solidFill>
                   <a:srgbClr val="1A1D26"/>
                 </a:solidFill>
-                <a:latin typeface="PingFang SC"/>
-                <a:ea typeface="PingFang SC"/>
-              </a:rPr>
-              <a:t>温度计较上周五回升</a:t>
-            </a:r>
-            <a:r>
-              <a:rPr lang="en-US" sz="938">
+                <a:latin typeface="PingFang SC" panose="020B0400000000000000" charset="-122"/>
+                <a:ea typeface="PingFang SC" panose="020B0400000000000000" charset="-122"/>
+              </a:rPr>
+              <a:t> 6.3°</a:t>
+            </a:r>
+            <a:r>
+              <a:rPr lang="zh-CN" sz="940">
                 <a:solidFill>
                   <a:srgbClr val="1A1D26"/>
                 </a:solidFill>
-                <a:latin typeface="PingFang SC"/>
-                <a:ea typeface="PingFang SC"/>
-              </a:rPr>
-              <a:t xml:space="preserve"> 1.4°</a:t>
-            </a:r>
-            <a:r>
-              <a:rPr lang="zh-CN" sz="938">
+                <a:latin typeface="PingFang SC" panose="020B0400000000000000" charset="-122"/>
+                <a:ea typeface="PingFang SC" panose="020B0400000000000000" charset="-122"/>
+              </a:rPr>
+              <a:t>；回落主要由「行业拥挤度</a:t>
+            </a:r>
+            <a:r>
+              <a:rPr lang="zh-CN" sz="940">
                 <a:solidFill>
                   <a:srgbClr val="1A1D26"/>
                 </a:solidFill>
-                <a:latin typeface="PingFang SC"/>
-                <a:ea typeface="PingFang SC"/>
-              </a:rPr>
-              <a:t>，主要由「上涨股票占比」（</a:t>
-            </a:r>
-            <a:r>
-              <a:rPr lang="en-US" sz="938">
+                <a:latin typeface="PingFang SC" panose="020B0400000000000000" charset="-122"/>
+                <a:ea typeface="PingFang SC" panose="020B0400000000000000" charset="-122"/>
+              </a:rPr>
+              <a:t>分位数」与「月涨跌幅过去一年</a:t>
+            </a:r>
+            <a:r>
+              <a:rPr lang="zh-CN" sz="940">
                 <a:solidFill>
                   <a:srgbClr val="1A1D26"/>
                 </a:solidFill>
-                <a:latin typeface="PingFang SC"/>
-                <a:ea typeface="PingFang SC"/>
-              </a:rPr>
-              <a:t>18.8→26.1</a:t>
-            </a:r>
-            <a:r>
-              <a:rPr lang="zh-CN" sz="938">
+                <a:latin typeface="PingFang SC" panose="020B0400000000000000" charset="-122"/>
+                <a:ea typeface="PingFang SC" panose="020B0400000000000000" charset="-122"/>
+              </a:rPr>
+              <a:t>分位数」两项得分走低拖累，</a:t>
+            </a:r>
+            <a:r>
+              <a:rPr lang="en-US" sz="940">
                 <a:solidFill>
                   <a:srgbClr val="1A1D26"/>
                 </a:solidFill>
-                <a:latin typeface="PingFang SC"/>
-                <a:ea typeface="PingFang SC"/>
-              </a:rPr>
-              <a:t>，</a:t>
-            </a:r>
-            <a:r>
-              <a:rPr lang="en-US" sz="938">
+                <a:latin typeface="PingFang SC" panose="020B0400000000000000" charset="-122"/>
+                <a:ea typeface="PingFang SC" panose="020B0400000000000000" charset="-122"/>
+              </a:rPr>
+              <a:t>10 </a:t>
+            </a:r>
+            <a:r>
+              <a:rPr lang="zh-CN" sz="940">
                 <a:solidFill>
                   <a:srgbClr val="1A1D26"/>
                 </a:solidFill>
-                <a:latin typeface="PingFang SC"/>
-                <a:ea typeface="PingFang SC"/>
-              </a:rPr>
-              <a:t>+7.3pt</a:t>
-            </a:r>
-            <a:r>
-              <a:rPr lang="zh-CN" sz="938">
+                <a:latin typeface="PingFang SC" panose="020B0400000000000000" charset="-122"/>
+                <a:ea typeface="PingFang SC" panose="020B0400000000000000" charset="-122"/>
+              </a:rPr>
+              <a:t>个因子中</a:t>
+            </a:r>
+            <a:r>
+              <a:rPr lang="en-US" sz="940">
                 <a:solidFill>
                   <a:srgbClr val="1A1D26"/>
                 </a:solidFill>
-                <a:latin typeface="PingFang SC"/>
-                <a:ea typeface="PingFang SC"/>
-              </a:rPr>
-              <a:t>）与「</a:t>
-            </a:r>
-            <a:r>
-              <a:rPr lang="en-US" sz="938">
+                <a:latin typeface="PingFang SC" panose="020B0400000000000000" charset="-122"/>
+                <a:ea typeface="PingFang SC" panose="020B0400000000000000" charset="-122"/>
+              </a:rPr>
+              <a:t> 8 </a:t>
+            </a:r>
+            <a:r>
+              <a:rPr lang="zh-CN" sz="940">
                 <a:solidFill>
                   <a:srgbClr val="1A1D26"/>
                 </a:solidFill>
-                <a:latin typeface="PingFang SC"/>
-                <a:ea typeface="PingFang SC"/>
-              </a:rPr>
-              <a:t>250</a:t>
-            </a:r>
-            <a:r>
-              <a:rPr lang="zh-CN" sz="938">
+                <a:latin typeface="PingFang SC" panose="020B0400000000000000" charset="-122"/>
+                <a:ea typeface="PingFang SC" panose="020B0400000000000000" charset="-122"/>
+              </a:rPr>
+              <a:t>项</a:t>
+            </a:r>
+            <a:r>
+              <a:rPr lang="zh-CN" sz="940">
                 <a:solidFill>
                   <a:srgbClr val="1A1D26"/>
                 </a:solidFill>
-                <a:latin typeface="PingFang SC"/>
-                <a:ea typeface="PingFang SC"/>
-              </a:rPr>
-              <a:t>日月跌幅均指滚动百分位」（</a:t>
-            </a:r>
-            <a:r>
-              <a:rPr lang="en-US" sz="938">
-                <a:solidFill>
-                  <a:srgbClr val="1A1D26"/>
-                </a:solidFill>
-                <a:latin typeface="PingFang SC"/>
-                <a:ea typeface="PingFang SC"/>
-              </a:rPr>
-              <a:t>29.7→34.9</a:t>
-            </a:r>
-            <a:r>
-              <a:rPr lang="zh-CN" sz="938">
-                <a:solidFill>
-                  <a:srgbClr val="1A1D26"/>
-                </a:solidFill>
-                <a:latin typeface="PingFang SC"/>
-                <a:ea typeface="PingFang SC"/>
-              </a:rPr>
-              <a:t>，</a:t>
-            </a:r>
-            <a:r>
-              <a:rPr lang="en-US" sz="938">
-                <a:solidFill>
-                  <a:srgbClr val="1A1D26"/>
-                </a:solidFill>
-                <a:latin typeface="PingFang SC"/>
-                <a:ea typeface="PingFang SC"/>
-              </a:rPr>
-              <a:t>+5.2pt</a:t>
-            </a:r>
-            <a:r>
-              <a:rPr lang="zh-CN" sz="938">
-                <a:solidFill>
-                  <a:srgbClr val="1A1D26"/>
-                </a:solidFill>
-                <a:latin typeface="PingFang SC"/>
-                <a:ea typeface="PingFang SC"/>
-              </a:rPr>
-              <a:t>）两项因子得分修复驱动，行业拥挤度（</a:t>
-            </a:r>
-            <a:r>
-              <a:rPr lang="en-US" sz="938">
-                <a:solidFill>
-                  <a:srgbClr val="1A1D26"/>
-                </a:solidFill>
-                <a:latin typeface="PingFang SC"/>
-                <a:ea typeface="PingFang SC"/>
-              </a:rPr>
-              <a:t>77.1→72.6</a:t>
-            </a:r>
-            <a:r>
-              <a:rPr lang="zh-CN" sz="938">
-                <a:solidFill>
-                  <a:srgbClr val="1A1D26"/>
-                </a:solidFill>
-                <a:latin typeface="PingFang SC"/>
-                <a:ea typeface="PingFang SC"/>
-              </a:rPr>
-              <a:t>，−</a:t>
-            </a:r>
-            <a:r>
-              <a:rPr lang="en-US" sz="938">
-                <a:solidFill>
-                  <a:srgbClr val="1A1D26"/>
-                </a:solidFill>
-                <a:latin typeface="PingFang SC"/>
-                <a:ea typeface="PingFang SC"/>
-              </a:rPr>
-              <a:t>4.5pt</a:t>
-            </a:r>
-            <a:r>
-              <a:rPr lang="zh-CN" sz="938">
-                <a:solidFill>
-                  <a:srgbClr val="1A1D26"/>
-                </a:solidFill>
-                <a:latin typeface="PingFang SC"/>
-                <a:ea typeface="PingFang SC"/>
-              </a:rPr>
-              <a:t>）回落形成部分对冲。温度计为</a:t>
-            </a:r>
-            <a:r>
-              <a:rPr lang="en-US" sz="938">
-                <a:solidFill>
-                  <a:srgbClr val="1A1D26"/>
-                </a:solidFill>
-                <a:latin typeface="PingFang SC"/>
-                <a:ea typeface="PingFang SC"/>
-              </a:rPr>
-              <a:t xml:space="preserve"> 10 </a:t>
-            </a:r>
-            <a:r>
-              <a:rPr lang="zh-CN" sz="938">
-                <a:solidFill>
-                  <a:srgbClr val="1A1D26"/>
-                </a:solidFill>
-                <a:latin typeface="PingFang SC"/>
-                <a:ea typeface="PingFang SC"/>
-              </a:rPr>
-              <a:t>因子等权合成，周内对比区间</a:t>
-            </a:r>
-            <a:r>
-              <a:rPr lang="en-US" sz="938">
-                <a:solidFill>
-                  <a:srgbClr val="1A1D26"/>
-                </a:solidFill>
-                <a:latin typeface="PingFang SC"/>
-                <a:ea typeface="PingFang SC"/>
-              </a:rPr>
-              <a:t xml:space="preserve"> 2026-09-18 → 2026-09-22</a:t>
-            </a:r>
-            <a:r>
-              <a:rPr lang="zh-CN" sz="938">
-                <a:solidFill>
-                  <a:srgbClr val="1A1D26"/>
-                </a:solidFill>
-                <a:latin typeface="PingFang SC"/>
-                <a:ea typeface="PingFang SC"/>
-              </a:rPr>
-              <a:t>。</a:t>
-            </a:r>
-            <a:endParaRPr/>
+                <a:latin typeface="PingFang SC" panose="020B0400000000000000" charset="-122"/>
+                <a:ea typeface="PingFang SC" panose="020B0400000000000000" charset="-122"/>
+              </a:rPr>
+              <a:t>持续下滑</a:t>
+            </a:r>
+            <a:endParaRPr lang="zh-CN" sz="940">
+              <a:solidFill>
+                <a:srgbClr val="1A1D26"/>
+              </a:solidFill>
+              <a:latin typeface="PingFang SC" panose="020B0400000000000000" charset="-122"/>
+              <a:ea typeface="PingFang SC" panose="020B0400000000000000" charset="-122"/>
+            </a:endParaRPr>
           </a:p>
         </p:txBody>
       </p:sp>
       <p:sp>
         <p:nvSpPr>
-          <p:cNvPr id="24" name=""/>
+          <p:cNvPr id="20" name="矩形 19"/>
           <p:cNvSpPr/>
           <p:nvPr/>
         </p:nvSpPr>
         <p:spPr>
-          <a:xfrm rot="0" flipH="0" flipV="0">
+          <a:xfrm>
             <a:off x="0" y="6572250"/>
             <a:ext cx="12192000" cy="285750"/>
           </a:xfrm>
@@ -1706,7 +1480,6 @@
           <a:solidFill>
             <a:srgbClr val="1F3A6E"/>
           </a:solidFill>
-          <a:ln/>
         </p:spPr>
         <p:txBody>
           <a:bodyPr/>
@@ -1715,16 +1488,18 @@
       </p:sp>
       <p:sp>
         <p:nvSpPr>
-          <p:cNvPr id="25" name="" descr="{&quot;isTemplate&quot;:true,&quot;type&quot;:&quot;text&quot;}"/>
+          <p:cNvPr id="21" name="文本框 20" descr="{&quot;isTemplate&quot;:true,&quot;type&quot;:&quot;text&quot;}"/>
           <p:cNvSpPr txBox="1"/>
           <p:nvPr/>
         </p:nvSpPr>
         <p:spPr>
-          <a:xfrm rot="0" flipH="0" flipV="0">
+          <a:xfrm>
             <a:off x="11449050" y="6648450"/>
             <a:ext cx="361950" cy="133350"/>
           </a:xfrm>
-          <a:prstGeom prst="rect"/>
+          <a:prstGeom prst="rect">
+            <a:avLst/>
+          </a:prstGeom>
         </p:spPr>
         <p:txBody>
           <a:bodyPr wrap="none" lIns="0" tIns="0" rIns="0" bIns="0"/>
@@ -1741,26 +1516,37 @@
                     <a:alpha val="80000"/>
                   </a:srgbClr>
                 </a:solidFill>
-                <a:latin typeface="PingFang SC"/>
-                <a:ea typeface="PingFang SC"/>
+                <a:latin typeface="PingFang SC" panose="020B0400000000000000" charset="-122"/>
+                <a:ea typeface="PingFang SC" panose="020B0400000000000000" charset="-122"/>
               </a:rPr>
               <a:t>01 / 02</a:t>
             </a:r>
-            <a:endParaRPr/>
+            <a:endParaRPr lang="en-US" sz="825">
+              <a:solidFill>
+                <a:srgbClr val="FFFFFF">
+                  <a:alpha val="80000"/>
+                </a:srgbClr>
+              </a:solidFill>
+              <a:latin typeface="PingFang SC" panose="020B0400000000000000" charset="-122"/>
+              <a:ea typeface="PingFang SC" panose="020B0400000000000000" charset="-122"/>
+            </a:endParaRPr>
           </a:p>
         </p:txBody>
       </p:sp>
     </p:spTree>
   </p:cSld>
+  <p:clrMapOvr>
+    <a:masterClrMapping/>
+  </p:clrMapOvr>
 </p:sld>
 </file>
 
 <file path=ppt/slides/slide2.xml><?xml version="1.0" encoding="utf-8"?>
-<p:sld xmlns:a16="http://schemas.microsoft.com/office/drawing/2014/main" xmlns:r="http://schemas.openxmlformats.org/officeDocument/2006/relationships" xmlns:p="http://schemas.openxmlformats.org/presentationml/2006/main" xmlns:a="http://schemas.openxmlformats.org/drawingml/2006/main" xmlns:mc="http://schemas.openxmlformats.org/markup-compatibility/2006" mc:Ignorable="a16">
+<p:sld xmlns:a="http://schemas.openxmlformats.org/drawingml/2006/main" xmlns:r="http://schemas.openxmlformats.org/officeDocument/2006/relationships" xmlns:p="http://schemas.openxmlformats.org/presentationml/2006/main">
   <p:cSld>
     <p:spTree>
       <p:nvGrpSpPr>
-        <p:cNvPr id="26" name="" descr="&lt;Slide style={{ width: 1280, height: 720, background: '#F4F6F9', fontFamily: 'PingFang SC', display: 'flex', flexDirection: 'column' }}&gt;&#10;&#10;  &lt;Box style={{ height: 88, background: '#1F3A6E', padding: '0 40px', display: 'flex', alignItems: 'center', justifyContent: 'space-between' }}&gt;&#10;    &lt;Box&gt;&#10;      &lt;Text style={{ fontSize: 25, fontWeight: '600', color: '#FFFFFF' }}&gt;低温买入产业趋势组合：历史胜率与赔率&lt;/Text&gt;&#10;      &lt;Text style={{ fontSize: 12, color: 'rgba(255,255,255,0.75)', marginTop: 5 }}&gt;科技温度计跌破 40° 当日买入　|　事件口径，21 次信号　|　窗口 2023-09-25 ~ 2026-09-18　|　持有期不足的样本剔除&lt;/Text&gt;&#10;    &lt;/Box&gt;&#10;    &lt;Text style={{ fontSize: 13, color: 'rgba(255,255,255,0.85)' }}&gt;研究结论&lt;/Text&gt;&#10;  &lt;/Box&gt;&#10;&#10;  &lt;Box style={{ padding: '12px 40px 0', display: 'flex', flexDirection: 'column', alignItems: 'center' }}&gt;&#10;    &lt;Box style={{ background: '#FFFFFF', border: '1px solid #E5E8EE', borderRadius: 12, padding: '8px 10px', display: 'flex', justifyContent: 'center', alignItems: 'center' }}&gt;&#10;      &lt;Image src=&quot;assets/p2_events.png&quot; style={{ width: 860, height: 343 }} /&gt;&#10;    &lt;/Box&gt;&#10;&#10;    &lt;Table&#10;      style={{ width: 1160, height: 148, marginTop: 12 }}&#10;      defaultTextStyle={{ fontSize: 13, textAlign: 'center', color: '#1A1D26' }}&#10;      defaultCellStyle={{&#10;        border: {&#10;          left: { width: 1, color: '#E5E8EE' },&#10;          right: { width: 1, color: '#E5E8EE' },&#10;          top: { width: 1, color: '#E5E8EE' },&#10;          bottom: { width: 1, color: '#E5E8EE' },&#10;        },&#10;      }}&#10;      cells={[&#10;        [&#10;          { text: '持有期', textStyle: { bold: true, color: '#FFFFFF', fontSize: 13 }, cellStyle: { background: { color: '#1F3A6E' } } },&#10;          { text: '样本数', textStyle: { bold: true, color: '#FFFFFF', fontSize: 13 }, cellStyle: { background: { color: '#1F3A6E' } } },&#10;          { text: '胜率（收益&gt;0）', textStyle: { bold: true, color: '#FFFFFF', fontSize: 13 }, cellStyle: { background: { color: '#1F3A6E' } } },&#10;          { text: '平均年化', textStyle: { bold: true, color: '#FFFFFF', fontSize: 13 }, cellStyle: { background: { color: '#1F3A6E' } } },&#10;          { text: '年化中位数', textStyle: { bold: true, color: '#FFFFFF', fontSize: 13 }, cellStyle: { background: { color: '#1F3A6E' } } },&#10;          { text: '平均绝对收益', textStyle: { bold: true, color: '#FFFFFF', fontSize: 13 }, cellStyle: { background: { color: '#1F3A6E' } } },&#10;          { text: '收益最高买入点', textStyle: { bold: true, color: '#FFFFFF', fontSize: 13 }, cellStyle: { background: { color: '#1F3A6E' } } },&#10;        ],&#10;        [&#10;          { text: '半年', textStyle: { bold: true } }, '18', { text: '94%（17/18）' }, { text: '+139.3%', textStyle: { color: '#D93636', bold: true } }, '+150.3%', '+50.6%', '2025-04-07（+105.6%）',&#10;        ],&#10;        [&#10;          { text: '一年', textStyle: { bold: true }, cellStyle: { background: { color: '#F7F9FC' } } },&#10;          { text: '18', cellStyle: { background: { color: '#F7F9FC' } } },&#10;          { text: '94%（17/18）', cellStyle: { background: { color: '#F7F9FC' } } },&#10;          { text: '+98.6%', textStyle: { color: '#D93636', bold: true }, cellStyle: { background: { color: '#F7F9FC' } } },&#10;          { text: '+98.5%', cellStyle: { background: { color: '#F7F9FC' } } },&#10;          { text: '+98.4%', cellStyle: { background: { color: '#F7F9FC' } } },&#10;          { text: '2025-06-20（+224.6%）', cellStyle: { background: { color: '#F7F9FC' } } },&#10;        ],&#10;        [&#10;          { text: '两年', textStyle: { bold: true } }, '9', { text: '100%（9/9）', textStyle: { bold: true } }, { text: '+63.9%', textStyle: { color: '#D93636', bold: true } }, '+69.6%', '+171.1%', '2024-05-29（+243.4%）',&#10;        ],&#10;      ]}&#10;    /&gt;&#10;&#10;    &lt;Box style={{ marginTop: 10, width: 1160, background: '#FFFAF0', border: '1px solid #F6E0B5', borderRadius: 10, padding: '8px 18px' }}&gt;&#10;      &lt;Text style={{ fontSize: 12, color: '#7A5A20', lineHeight: 1.5 }}&gt;&#10;        最佳买点集中在恐慌最深处（2025-04 关税冲击）与牛市前磨底期（2024-04~05）；持有越久总收益越高、年化越低。注意：21 次信号仅来自 3 个低温带且持仓期高度重叠，胜率不能视作独立重复胜率；模拟组合回测，未计申赎费与冲击成本。&#10;      &lt;/Text&gt;&#10;    &lt;/Box&gt;&#10;  &lt;/Box&gt;&#10;&#10;  &lt;Box style={{ position: 'absolute', left: 0, right: 0, bottom: 0, height: 30, background: '#1F3A6E', display: 'flex', alignItems: 'center', justifyContent: 'flex-end', padding: '0 40px' }}&gt;&#10;    &lt;Text style={{ fontSize: 11, color: 'rgba(255,255,255,0.8)' }}&gt;02 / 02&lt;/Text&gt;&#10;  &lt;/Box&gt;&#10;&#10;&lt;/Slide&gt;&#10;"/>
+        <p:cNvPr id="22" name="" descr="&lt;Slide style={{ width: 1280, height: 720, background: '#F4F6F9', fontFamily: 'PingFang SC', display: 'flex', flexDirection: 'column' }}&gt;&#10;&#10;  &lt;Box style={{ height: 88, background: '#1F3A6E', padding: '0 40px', display: 'flex', alignItems: 'center', justifyContent: 'space-between' }}&gt;&#10;    &lt;Box&gt;&#10;      &lt;Text style={{ fontSize: 25, fontWeight: '600', color: '#FFFFFF' }}&gt;低温买入产业趋势组合：历史胜率与赔率&lt;/Text&gt;&#10;      &lt;Text style={{ fontSize: 12, color: 'rgba(255,255,255,0.75)', marginTop: 5 }}&gt;科技温度计跌破 40° 当日买入　|　事件口径，22 次信号　|　回测窗口 2023-09-25 ~ 2026-09-18　|　持有期不足的样本剔除&lt;/Text&gt;&#10;    &lt;/Box&gt;&#10;    &lt;Text style={{ fontSize: 13, color: 'rgba(255,255,255,0.85)' }}&gt;研究结论&lt;/Text&gt;&#10;  &lt;/Box&gt;&#10;&#10;  &lt;Box style={{ padding: '12px 40px 0', display: 'flex', flexDirection: 'column', alignItems: 'center' }}&gt;&#10;    &lt;Box style={{ background: '#FFFFFF', border: '1px solid #E5E8EE', borderRadius: 12, padding: '8px 10px', display: 'flex', justifyContent: 'center', alignItems: 'center' }}&gt;&#10;      &lt;Image src=&quot;assets/p2_events.png&quot; style={{ width: 955, height: 392 }} /&gt;&#10;    &lt;/Box&gt;&#10;&#10;    &lt;Table&#10;      style={{ width: 1160, height: 156, marginTop: 14 }}&#10;      defaultTextStyle={{ fontSize: 14, textAlign: 'center', color: '#1A1D26' }}&#10;      defaultCellStyle={{&#10;        border: {&#10;          left: { width: 1, color: '#E5E8EE' },&#10;          right: { width: 1, color: '#E5E8EE' },&#10;          top: { width: 1, color: '#E5E8EE' },&#10;          bottom: { width: 1, color: '#E5E8EE' },&#10;        },&#10;      }}&#10;      cells={[&#10;        [&#10;          { text: '持有期', textStyle: { bold: true, color: '#FFFFFF', fontSize: 14 }, cellStyle: { background: { color: '#1F3A6E' } } },&#10;          { text: '胜率（收益&gt;0）', textStyle: { bold: true, color: '#FFFFFF', fontSize: 14 }, cellStyle: { background: { color: '#1F3A6E' } } },&#10;          { text: '平均年化', textStyle: { bold: true, color: '#FFFFFF', fontSize: 14 }, cellStyle: { background: { color: '#1F3A6E' } } },&#10;          { text: '年化中位数', textStyle: { bold: true, color: '#FFFFFF', fontSize: 14 }, cellStyle: { background: { color: '#1F3A6E' } } },&#10;          { text: '平均绝对收益', textStyle: { bold: true, color: '#FFFFFF', fontSize: 14 }, cellStyle: { background: { color: '#1F3A6E' } } },&#10;          { text: '收益最高买入点', textStyle: { bold: true, color: '#FFFFFF', fontSize: 14 }, cellStyle: { background: { color: '#1F3A6E' } } },&#10;        ],&#10;        [&#10;          { text: '半年', textStyle: { bold: true } },&#10;          { text: '94%', textStyle: { color: '#D93636', bold: true } },&#10;          { text: '+139.3%', textStyle: { color: '#D93636', bold: true } },&#10;          '+150.3%',&#10;          '+50.6%',&#10;          '2025-04-07（+105.6%）',&#10;        ],&#10;        [&#10;          { text: '一年', textStyle: { bold: true }, cellStyle: { background: { color: '#F7F9FC' } } },&#10;          { text: '94%', textStyle: { color: '#D93636', bold: true }, cellStyle: { background: { color: '#F7F9FC' } } },&#10;          { text: '+98.6%', textStyle: { color: '#D93636', bold: true }, cellStyle: { background: { color: '#F7F9FC' } } },&#10;          { text: '+98.5%', cellStyle: { background: { color: '#F7F9FC' } } },&#10;          { text: '+98.4%', cellStyle: { background: { color: '#F7F9FC' } } },&#10;          { text: '2025-06-20（+224.6%）', cellStyle: { background: { color: '#F7F9FC' } } },&#10;        ],&#10;        [&#10;          { text: '两年', textStyle: { bold: true } },&#10;          { text: '100%', textStyle: { color: '#D93636', bold: true } },&#10;          { text: '+63.9%', textStyle: { color: '#D93636', bold: true } },&#10;          '+69.6%',&#10;          '+171.1%',&#10;          '2024-05-29（+243.4%）',&#10;        ],&#10;      ]}&#10;    /&gt;&#10;  &lt;/Box&gt;&#10;&#10;  &lt;Box style={{ position: 'absolute', left: 0, right: 0, bottom: 0, height: 30, background: '#1F3A6E', display: 'flex', alignItems: 'center', justifyContent: 'flex-end', padding: '0 40px' }}&gt;&#10;    &lt;Text style={{ fontSize: 11, color: 'rgba(255,255,255,0.8)' }}&gt;02 / 02&lt;/Text&gt;&#10;  &lt;/Box&gt;&#10;&#10;&lt;/Slide&gt;&#10;"/>
         <p:cNvGrpSpPr/>
         <p:nvPr/>
       </p:nvGrpSpPr>
@@ -1774,12 +1560,12 @@
       </p:grpSpPr>
       <p:sp>
         <p:nvSpPr>
-          <p:cNvPr id="27" name=""/>
+          <p:cNvPr id="23" name="矩形 22"/>
           <p:cNvSpPr/>
           <p:nvPr/>
         </p:nvSpPr>
         <p:spPr>
-          <a:xfrm rot="0" flipH="0" flipV="0">
+          <a:xfrm>
             <a:off x="0" y="0"/>
             <a:ext cx="12192000" cy="6858000"/>
           </a:xfrm>
@@ -1789,7 +1575,6 @@
           <a:solidFill>
             <a:srgbClr val="F4F6F9"/>
           </a:solidFill>
-          <a:ln/>
         </p:spPr>
         <p:txBody>
           <a:bodyPr/>
@@ -1798,12 +1583,12 @@
       </p:sp>
       <p:sp>
         <p:nvSpPr>
-          <p:cNvPr id="28" name=""/>
+          <p:cNvPr id="24" name="矩形 23"/>
           <p:cNvSpPr/>
           <p:nvPr/>
         </p:nvSpPr>
         <p:spPr>
-          <a:xfrm rot="0" flipH="0" flipV="0">
+          <a:xfrm>
             <a:off x="0" y="0"/>
             <a:ext cx="12192000" cy="838200"/>
           </a:xfrm>
@@ -1813,7 +1598,6 @@
           <a:solidFill>
             <a:srgbClr val="1F3A6E"/>
           </a:solidFill>
-          <a:ln/>
         </p:spPr>
         <p:txBody>
           <a:bodyPr/>
@@ -1822,16 +1606,18 @@
       </p:sp>
       <p:sp>
         <p:nvSpPr>
-          <p:cNvPr id="29" name="" descr="{&quot;isTemplate&quot;:true,&quot;type&quot;:&quot;text&quot;}"/>
+          <p:cNvPr id="25" name="文本框 24" descr="{&quot;isTemplate&quot;:true,&quot;type&quot;:&quot;text&quot;}"/>
           <p:cNvSpPr txBox="1"/>
           <p:nvPr/>
         </p:nvSpPr>
         <p:spPr>
-          <a:xfrm rot="0" flipH="0" flipV="0">
+          <a:xfrm>
             <a:off x="381000" y="180975"/>
-            <a:ext cx="6229350" cy="285750"/>
+            <a:ext cx="6477000" cy="285750"/>
           </a:xfrm>
-          <a:prstGeom prst="rect"/>
+          <a:prstGeom prst="rect">
+            <a:avLst/>
+          </a:prstGeom>
         </p:spPr>
         <p:txBody>
           <a:bodyPr wrap="none" lIns="0" tIns="0" rIns="0" bIns="0"/>
@@ -1846,27 +1632,35 @@
                 <a:solidFill>
                   <a:srgbClr val="FFFFFF"/>
                 </a:solidFill>
-                <a:latin typeface="PingFang SC"/>
-                <a:ea typeface="PingFang SC"/>
+                <a:latin typeface="PingFang SC" panose="020B0400000000000000" charset="-122"/>
+                <a:ea typeface="PingFang SC" panose="020B0400000000000000" charset="-122"/>
               </a:rPr>
               <a:t>低温买入产业趋势组合：历史胜率与赔率</a:t>
             </a:r>
-            <a:endParaRPr/>
+            <a:endParaRPr lang="zh-CN" sz="1875" b="1">
+              <a:solidFill>
+                <a:srgbClr val="FFFFFF"/>
+              </a:solidFill>
+              <a:latin typeface="PingFang SC" panose="020B0400000000000000" charset="-122"/>
+              <a:ea typeface="PingFang SC" panose="020B0400000000000000" charset="-122"/>
+            </a:endParaRPr>
           </a:p>
         </p:txBody>
       </p:sp>
       <p:sp>
         <p:nvSpPr>
-          <p:cNvPr id="30" name="" descr="{&quot;isTemplate&quot;:true,&quot;type&quot;:&quot;text&quot;}"/>
+          <p:cNvPr id="26" name="文本框 25" descr="{&quot;isTemplate&quot;:true,&quot;type&quot;:&quot;text&quot;}"/>
           <p:cNvSpPr txBox="1"/>
           <p:nvPr/>
         </p:nvSpPr>
         <p:spPr>
-          <a:xfrm rot="0" flipH="0" flipV="0">
+          <a:xfrm>
             <a:off x="381000" y="514350"/>
-            <a:ext cx="6229350" cy="142875"/>
+            <a:ext cx="6477000" cy="142875"/>
           </a:xfrm>
-          <a:prstGeom prst="rect"/>
+          <a:prstGeom prst="rect">
+            <a:avLst/>
+          </a:prstGeom>
         </p:spPr>
         <p:txBody>
           <a:bodyPr wrap="none" lIns="0" tIns="0" rIns="0" bIns="0"/>
@@ -1883,8 +1677,8 @@
                     <a:alpha val="75000"/>
                   </a:srgbClr>
                 </a:solidFill>
-                <a:latin typeface="PingFang SC"/>
-                <a:ea typeface="PingFang SC"/>
+                <a:latin typeface="PingFang SC" panose="020B0400000000000000" charset="-122"/>
+                <a:ea typeface="PingFang SC" panose="020B0400000000000000" charset="-122"/>
               </a:rPr>
               <a:t>科技温度计跌破</a:t>
             </a:r>
@@ -1895,10 +1689,10 @@
                     <a:alpha val="75000"/>
                   </a:srgbClr>
                 </a:solidFill>
-                <a:latin typeface="PingFang SC"/>
-                <a:ea typeface="PingFang SC"/>
-              </a:rPr>
-              <a:t xml:space="preserve"> 40° </a:t>
+                <a:latin typeface="PingFang SC" panose="020B0400000000000000" charset="-122"/>
+                <a:ea typeface="PingFang SC" panose="020B0400000000000000" charset="-122"/>
+              </a:rPr>
+              <a:t> 40° </a:t>
             </a:r>
             <a:r>
               <a:rPr lang="zh-CN" sz="900">
@@ -1907,8 +1701,8 @@
                     <a:alpha val="75000"/>
                   </a:srgbClr>
                 </a:solidFill>
-                <a:latin typeface="PingFang SC"/>
-                <a:ea typeface="PingFang SC"/>
+                <a:latin typeface="PingFang SC" panose="020B0400000000000000" charset="-122"/>
+                <a:ea typeface="PingFang SC" panose="020B0400000000000000" charset="-122"/>
               </a:rPr>
               <a:t>当日买入　</a:t>
             </a:r>
@@ -1919,8 +1713,8 @@
                     <a:alpha val="75000"/>
                   </a:srgbClr>
                 </a:solidFill>
-                <a:latin typeface="PingFang SC"/>
-                <a:ea typeface="PingFang SC"/>
+                <a:latin typeface="PingFang SC" panose="020B0400000000000000" charset="-122"/>
+                <a:ea typeface="PingFang SC" panose="020B0400000000000000" charset="-122"/>
               </a:rPr>
               <a:t>|</a:t>
             </a:r>
@@ -1931,123 +1725,145 @@
                     <a:alpha val="75000"/>
                   </a:srgbClr>
                 </a:solidFill>
-                <a:latin typeface="PingFang SC"/>
-                <a:ea typeface="PingFang SC"/>
-              </a:rPr>
-              <a:t>　事件口径，</a:t>
-            </a:r>
-            <a:r>
-              <a:rPr lang="en-US" sz="900">
+                <a:latin typeface="PingFang SC" panose="020B0400000000000000" charset="-122"/>
+                <a:ea typeface="PingFang SC" panose="020B0400000000000000" charset="-122"/>
+              </a:rPr>
+              <a:t>　事件统计口径</a:t>
+            </a:r>
+            <a:r>
+              <a:rPr lang="en-US" altLang="zh-CN" sz="900">
                 <a:solidFill>
                   <a:srgbClr val="FFFFFF">
                     <a:alpha val="75000"/>
                   </a:srgbClr>
                 </a:solidFill>
-                <a:latin typeface="PingFang SC"/>
-                <a:ea typeface="PingFang SC"/>
-              </a:rPr>
-              <a:t xml:space="preserve">21 </a:t>
-            </a:r>
-            <a:r>
-              <a:rPr lang="zh-CN" sz="900">
+                <a:latin typeface="PingFang SC" panose="020B0400000000000000" charset="-122"/>
+                <a:ea typeface="PingFang SC" panose="020B0400000000000000" charset="-122"/>
+              </a:rPr>
+              <a:t>=</a:t>
+            </a:r>
+            <a:r>
+              <a:rPr lang="en-US" sz="900">
                 <a:solidFill>
                   <a:srgbClr val="FFFFFF">
                     <a:alpha val="75000"/>
                   </a:srgbClr>
                 </a:solidFill>
-                <a:latin typeface="PingFang SC"/>
-                <a:ea typeface="PingFang SC"/>
-              </a:rPr>
-              <a:t>次信号　</a:t>
-            </a:r>
-            <a:r>
-              <a:rPr lang="en-US" sz="900">
+                <a:latin typeface="PingFang SC" panose="020B0400000000000000" charset="-122"/>
+                <a:ea typeface="PingFang SC" panose="020B0400000000000000" charset="-122"/>
+              </a:rPr>
+              <a:t>22 </a:t>
+            </a:r>
+            <a:r>
+              <a:rPr lang="zh-CN" sz="900">
                 <a:solidFill>
                   <a:srgbClr val="FFFFFF">
                     <a:alpha val="75000"/>
                   </a:srgbClr>
                 </a:solidFill>
-                <a:latin typeface="PingFang SC"/>
-                <a:ea typeface="PingFang SC"/>
-              </a:rPr>
-              <a:t>|</a:t>
-            </a:r>
-            <a:r>
-              <a:rPr lang="zh-CN" sz="900">
+                <a:latin typeface="PingFang SC" panose="020B0400000000000000" charset="-122"/>
+                <a:ea typeface="PingFang SC" panose="020B0400000000000000" charset="-122"/>
+              </a:rPr>
+              <a:t>次信号　</a:t>
+            </a:r>
+            <a:r>
+              <a:rPr lang="en-US" sz="900">
                 <a:solidFill>
                   <a:srgbClr val="FFFFFF">
                     <a:alpha val="75000"/>
                   </a:srgbClr>
                 </a:solidFill>
-                <a:latin typeface="PingFang SC"/>
-                <a:ea typeface="PingFang SC"/>
-              </a:rPr>
-              <a:t>　窗口</a:t>
-            </a:r>
-            <a:r>
-              <a:rPr lang="en-US" sz="900">
+                <a:latin typeface="PingFang SC" panose="020B0400000000000000" charset="-122"/>
+                <a:ea typeface="PingFang SC" panose="020B0400000000000000" charset="-122"/>
+              </a:rPr>
+              <a:t>|</a:t>
+            </a:r>
+            <a:r>
+              <a:rPr lang="zh-CN" sz="900">
                 <a:solidFill>
                   <a:srgbClr val="FFFFFF">
                     <a:alpha val="75000"/>
                   </a:srgbClr>
                 </a:solidFill>
-                <a:latin typeface="PingFang SC"/>
-                <a:ea typeface="PingFang SC"/>
-              </a:rPr>
-              <a:t xml:space="preserve"> 2023-09-25 ~ 2026-09-18</a:t>
-            </a:r>
-            <a:r>
-              <a:rPr lang="zh-CN" sz="900">
+                <a:latin typeface="PingFang SC" panose="020B0400000000000000" charset="-122"/>
+                <a:ea typeface="PingFang SC" panose="020B0400000000000000" charset="-122"/>
+              </a:rPr>
+              <a:t>　回测窗口</a:t>
+            </a:r>
+            <a:r>
+              <a:rPr lang="en-US" sz="900">
                 <a:solidFill>
                   <a:srgbClr val="FFFFFF">
                     <a:alpha val="75000"/>
                   </a:srgbClr>
                 </a:solidFill>
-                <a:latin typeface="PingFang SC"/>
-                <a:ea typeface="PingFang SC"/>
-              </a:rPr>
-              <a:t>　</a:t>
-            </a:r>
-            <a:r>
-              <a:rPr lang="en-US" sz="900">
+                <a:latin typeface="PingFang SC" panose="020B0400000000000000" charset="-122"/>
+                <a:ea typeface="PingFang SC" panose="020B0400000000000000" charset="-122"/>
+              </a:rPr>
+              <a:t> 2023-09-25 ~ 2026-09-18</a:t>
+            </a:r>
+            <a:r>
+              <a:rPr lang="zh-CN" sz="900">
                 <a:solidFill>
                   <a:srgbClr val="FFFFFF">
                     <a:alpha val="75000"/>
                   </a:srgbClr>
                 </a:solidFill>
-                <a:latin typeface="PingFang SC"/>
-                <a:ea typeface="PingFang SC"/>
-              </a:rPr>
-              <a:t>|</a:t>
-            </a:r>
-            <a:r>
-              <a:rPr lang="zh-CN" sz="900">
+                <a:latin typeface="PingFang SC" panose="020B0400000000000000" charset="-122"/>
+                <a:ea typeface="PingFang SC" panose="020B0400000000000000" charset="-122"/>
+              </a:rPr>
+              <a:t>　</a:t>
+            </a:r>
+            <a:r>
+              <a:rPr lang="en-US" sz="900">
                 <a:solidFill>
                   <a:srgbClr val="FFFFFF">
                     <a:alpha val="75000"/>
                   </a:srgbClr>
                 </a:solidFill>
-                <a:latin typeface="PingFang SC"/>
-                <a:ea typeface="PingFang SC"/>
+                <a:latin typeface="PingFang SC" panose="020B0400000000000000" charset="-122"/>
+                <a:ea typeface="PingFang SC" panose="020B0400000000000000" charset="-122"/>
+              </a:rPr>
+              <a:t>|</a:t>
+            </a:r>
+            <a:r>
+              <a:rPr lang="zh-CN" sz="900">
+                <a:solidFill>
+                  <a:srgbClr val="FFFFFF">
+                    <a:alpha val="75000"/>
+                  </a:srgbClr>
+                </a:solidFill>
+                <a:latin typeface="PingFang SC" panose="020B0400000000000000" charset="-122"/>
+                <a:ea typeface="PingFang SC" panose="020B0400000000000000" charset="-122"/>
               </a:rPr>
               <a:t>　持有期不足的样本剔除</a:t>
             </a:r>
-            <a:endParaRPr/>
+            <a:endParaRPr lang="zh-CN" sz="900">
+              <a:solidFill>
+                <a:srgbClr val="FFFFFF">
+                  <a:alpha val="75000"/>
+                </a:srgbClr>
+              </a:solidFill>
+              <a:latin typeface="PingFang SC" panose="020B0400000000000000" charset="-122"/>
+              <a:ea typeface="PingFang SC" panose="020B0400000000000000" charset="-122"/>
+            </a:endParaRPr>
           </a:p>
         </p:txBody>
       </p:sp>
       <p:sp>
         <p:nvSpPr>
-          <p:cNvPr id="31" name="" descr="{&quot;isTemplate&quot;:true,&quot;type&quot;:&quot;text&quot;}"/>
+          <p:cNvPr id="27" name="文本框 26" descr="{&quot;isTemplate&quot;:true,&quot;type&quot;:&quot;text&quot;}"/>
           <p:cNvSpPr txBox="1"/>
           <p:nvPr/>
         </p:nvSpPr>
         <p:spPr>
-          <a:xfrm rot="0" flipH="0" flipV="0">
+          <a:xfrm>
             <a:off x="11315700" y="342900"/>
             <a:ext cx="495300" cy="152400"/>
           </a:xfrm>
-          <a:prstGeom prst="rect"/>
+          <a:prstGeom prst="rect">
+            <a:avLst/>
+          </a:prstGeom>
         </p:spPr>
         <p:txBody>
           <a:bodyPr wrap="none" lIns="0" tIns="0" rIns="0" bIns="0"/>
@@ -2057,36 +1873,32 @@
                 <a:spcPct val="100000"/>
               </a:lnSpc>
             </a:pPr>
-            <a:r>
-              <a:rPr lang="zh-CN" sz="975">
-                <a:solidFill>
-                  <a:srgbClr val="FFFFFF">
-                    <a:alpha val="85000"/>
-                  </a:srgbClr>
-                </a:solidFill>
-                <a:latin typeface="PingFang SC"/>
-                <a:ea typeface="PingFang SC"/>
-              </a:rPr>
-              <a:t>研究结论</a:t>
-            </a:r>
-            <a:endParaRPr/>
+            <a:endParaRPr lang="zh-CN" sz="975">
+              <a:solidFill>
+                <a:srgbClr val="FFFFFF">
+                  <a:alpha val="85000"/>
+                </a:srgbClr>
+              </a:solidFill>
+              <a:latin typeface="PingFang SC" panose="020B0400000000000000" charset="-122"/>
+              <a:ea typeface="PingFang SC" panose="020B0400000000000000" charset="-122"/>
+            </a:endParaRPr>
           </a:p>
         </p:txBody>
       </p:sp>
       <p:sp>
         <p:nvSpPr>
-          <p:cNvPr id="32" name=""/>
+          <p:cNvPr id="28" name="圆角矩形 27"/>
           <p:cNvSpPr/>
           <p:nvPr/>
         </p:nvSpPr>
         <p:spPr>
-          <a:xfrm rot="0" flipH="0" flipV="0">
-            <a:off x="1905000" y="952500"/>
-            <a:ext cx="8382000" cy="3419475"/>
+          <a:xfrm>
+            <a:off x="1457325" y="952500"/>
+            <a:ext cx="9286875" cy="3886200"/>
           </a:xfrm>
           <a:prstGeom prst="roundRect">
             <a:avLst>
-              <a:gd name="adj" fmla="val 3343"/>
+              <a:gd name="adj" fmla="val 2941"/>
             </a:avLst>
           </a:prstGeom>
           <a:solidFill>
@@ -2106,7 +1918,7 @@
       </p:sp>
       <p:pic>
         <p:nvPicPr>
-          <p:cNvPr id="33" name=""/>
+          <p:cNvPr id="29" name="图片 28"/>
           <p:cNvPicPr>
             <a:picLocks noChangeAspect="1"/>
           </p:cNvPicPr>
@@ -2114,91 +1926,48 @@
         </p:nvPicPr>
         <p:blipFill>
           <a:blip r:embed="rId1"/>
-          <a:srcRect l="76" t="0" r="76" b="0"/>
+          <a:srcRect t="6" b="6"/>
           <a:stretch>
             <a:fillRect/>
           </a:stretch>
         </p:blipFill>
         <p:spPr>
-          <a:xfrm rot="0" flipH="0" flipV="0">
-            <a:off x="2000250" y="1028700"/>
-            <a:ext cx="8191500" cy="3267075"/>
+          <a:xfrm>
+            <a:off x="1552575" y="1028700"/>
+            <a:ext cx="9096375" cy="3733800"/>
           </a:xfrm>
           <a:prstGeom prst="rect">
             <a:avLst/>
           </a:prstGeom>
-          <a:ln/>
         </p:spPr>
       </p:pic>
       <p:graphicFrame>
         <p:nvGraphicFramePr>
-          <p:cNvPr id="34" name=""/>
+          <p:cNvPr id="30" name="表格 29"/>
           <p:cNvGraphicFramePr/>
           <p:nvPr/>
         </p:nvGraphicFramePr>
-        <p:xfrm rot="0" flipH="0" flipV="0">
-          <a:off x="571500" y="4486275"/>
-          <a:ext cx="11049000" cy="1409700"/>
+        <p:xfrm>
+          <a:off x="571500" y="4972050"/>
+          <a:ext cx="11049000" cy="1485900"/>
         </p:xfrm>
         <a:graphic>
           <a:graphicData uri="http://schemas.openxmlformats.org/drawingml/2006/table">
             <a:tbl>
+              <a:tblPr/>
               <a:tblGrid>
-                <a:gridCol w="928712">
-                  <a:extLst>
-                    <a:ext uri="{9D8B030D-6E8A-4147-A177-3AD203B41FA5}">
-                      <a16:colId val="1"/>
-                    </a:ext>
-                  </a:extLst>
-                </a:gridCol>
-                <a:gridCol w="928712">
-                  <a:extLst>
-                    <a:ext uri="{9D8B030D-6E8A-4147-A177-3AD203B41FA5}">
-                      <a16:colId val="2"/>
-                    </a:ext>
-                  </a:extLst>
-                </a:gridCol>
-                <a:gridCol w="1960615">
-                  <a:extLst>
-                    <a:ext uri="{9D8B030D-6E8A-4147-A177-3AD203B41FA5}">
-                      <a16:colId val="3"/>
-                    </a:ext>
-                  </a:extLst>
-                </a:gridCol>
-                <a:gridCol w="1177133">
-                  <a:extLst>
-                    <a:ext uri="{9D8B030D-6E8A-4147-A177-3AD203B41FA5}">
-                      <a16:colId val="4"/>
-                    </a:ext>
-                  </a:extLst>
-                </a:gridCol>
-                <a:gridCol w="1425554">
-                  <a:extLst>
-                    <a:ext uri="{9D8B030D-6E8A-4147-A177-3AD203B41FA5}">
-                      <a16:colId val="5"/>
-                    </a:ext>
-                  </a:extLst>
-                </a:gridCol>
-                <a:gridCol w="1673975">
-                  <a:extLst>
-                    <a:ext uri="{9D8B030D-6E8A-4147-A177-3AD203B41FA5}">
-                      <a16:colId val="6"/>
-                    </a:ext>
-                  </a:extLst>
-                </a:gridCol>
-                <a:gridCol w="2954299">
-                  <a:extLst>
-                    <a:ext uri="{9D8B030D-6E8A-4147-A177-3AD203B41FA5}">
-                      <a16:colId val="7"/>
-                    </a:ext>
-                  </a:extLst>
-                </a:gridCol>
+                <a:gridCol w="1008006"/>
+                <a:gridCol w="2141037"/>
+                <a:gridCol w="1281496"/>
+                <a:gridCol w="1554987"/>
+                <a:gridCol w="1828477"/>
+                <a:gridCol w="3234997"/>
               </a:tblGrid>
-              <a:tr h="352425">
+              <a:tr h="371475">
                 <a:tc>
                   <a:txBody>
-                    <a:bodyPr wrap="square" lIns="0" tIns="0" rIns="0" bIns="0" anchor="ctr">
-                      <a:normAutofit/>
+                    <a:bodyPr wrap="square">
+                      <a:spAutoFit/>
                     </a:bodyPr>
                     <a:p>
                       <a:pPr marL="114300" marR="114300" algn="l">
@@ -2207,19 +1976,25 @@
                         </a:lnSpc>
                       </a:pPr>
                       <a:r>
-                        <a:rPr sz="975" b="1">
+                        <a:rPr sz="1050" b="1">
                           <a:solidFill>
                             <a:srgbClr val="FFFFFF"/>
                           </a:solidFill>
-                          <a:latin typeface="Microsoft YaHei"/>
-                          <a:ea typeface="Microsoft YaHei"/>
+                          <a:latin typeface="微软雅黑"/>
+                          <a:ea typeface="微软雅黑"/>
                         </a:rPr>
                         <a:t>持有期</a:t>
                       </a:r>
-                      <a:endParaRPr/>
+                      <a:endParaRPr sz="1050" b="1">
+                        <a:solidFill>
+                          <a:srgbClr val="FFFFFF"/>
+                        </a:solidFill>
+                        <a:latin typeface="微软雅黑"/>
+                        <a:ea typeface="微软雅黑"/>
+                      </a:endParaRPr>
                     </a:p>
                   </a:txBody>
-                  <a:tcPr marL="45720" marR="45720" marT="45720" marB="45720" anchor="ctr">
+                  <a:tcPr marL="0" marR="0" marT="0" marB="0" anchor="ctr">
                     <a:lnL>
                       <a:noFill/>
                     </a:lnL>
@@ -2239,8 +2014,8 @@
                 </a:tc>
                 <a:tc>
                   <a:txBody>
-                    <a:bodyPr wrap="square" lIns="0" tIns="0" rIns="0" bIns="0" anchor="ctr">
-                      <a:normAutofit/>
+                    <a:bodyPr wrap="square">
+                      <a:spAutoFit/>
                     </a:bodyPr>
                     <a:p>
                       <a:pPr marL="114300" marR="114300" algn="l">
@@ -2249,19 +2024,25 @@
                         </a:lnSpc>
                       </a:pPr>
                       <a:r>
-                        <a:rPr sz="975" b="1">
+                        <a:rPr sz="1050" b="1">
                           <a:solidFill>
                             <a:srgbClr val="FFFFFF"/>
                           </a:solidFill>
-                          <a:latin typeface="Microsoft YaHei"/>
-                          <a:ea typeface="Microsoft YaHei"/>
+                          <a:latin typeface="微软雅黑"/>
+                          <a:ea typeface="微软雅黑"/>
                         </a:rPr>
-                        <a:t>样本数</a:t>
+                        <a:t>胜率（收益&gt;0）</a:t>
                       </a:r>
-                      <a:endParaRPr/>
+                      <a:endParaRPr sz="1050" b="1">
+                        <a:solidFill>
+                          <a:srgbClr val="FFFFFF"/>
+                        </a:solidFill>
+                        <a:latin typeface="微软雅黑"/>
+                        <a:ea typeface="微软雅黑"/>
+                      </a:endParaRPr>
                     </a:p>
                   </a:txBody>
-                  <a:tcPr marL="45720" marR="45720" marT="45720" marB="45720" anchor="ctr">
+                  <a:tcPr marL="0" marR="0" marT="0" marB="0" anchor="ctr">
                     <a:lnL>
                       <a:noFill/>
                     </a:lnL>
@@ -2281,8 +2062,8 @@
                 </a:tc>
                 <a:tc>
                   <a:txBody>
-                    <a:bodyPr wrap="square" lIns="0" tIns="0" rIns="0" bIns="0" anchor="ctr">
-                      <a:normAutofit/>
+                    <a:bodyPr wrap="square">
+                      <a:spAutoFit/>
                     </a:bodyPr>
                     <a:p>
                       <a:pPr marL="114300" marR="114300" algn="l">
@@ -2291,19 +2072,25 @@
                         </a:lnSpc>
                       </a:pPr>
                       <a:r>
-                        <a:rPr sz="975" b="1">
+                        <a:rPr sz="1050" b="1">
                           <a:solidFill>
                             <a:srgbClr val="FFFFFF"/>
                           </a:solidFill>
-                          <a:latin typeface="Microsoft YaHei"/>
-                          <a:ea typeface="Microsoft YaHei"/>
+                          <a:latin typeface="微软雅黑"/>
+                          <a:ea typeface="微软雅黑"/>
                         </a:rPr>
-                        <a:t>胜率（收益&gt;0）</a:t>
+                        <a:t>平均年化</a:t>
                       </a:r>
-                      <a:endParaRPr/>
+                      <a:endParaRPr sz="1050" b="1">
+                        <a:solidFill>
+                          <a:srgbClr val="FFFFFF"/>
+                        </a:solidFill>
+                        <a:latin typeface="微软雅黑"/>
+                        <a:ea typeface="微软雅黑"/>
+                      </a:endParaRPr>
                     </a:p>
                   </a:txBody>
-                  <a:tcPr marL="45720" marR="45720" marT="45720" marB="45720" anchor="ctr">
+                  <a:tcPr marL="0" marR="0" marT="0" marB="0" anchor="ctr">
                     <a:lnL>
                       <a:noFill/>
                     </a:lnL>
@@ -2323,8 +2110,8 @@
                 </a:tc>
                 <a:tc>
                   <a:txBody>
-                    <a:bodyPr wrap="square" lIns="0" tIns="0" rIns="0" bIns="0" anchor="ctr">
-                      <a:normAutofit/>
+                    <a:bodyPr wrap="square">
+                      <a:spAutoFit/>
                     </a:bodyPr>
                     <a:p>
                       <a:pPr marL="114300" marR="114300" algn="l">
@@ -2333,19 +2120,25 @@
                         </a:lnSpc>
                       </a:pPr>
                       <a:r>
-                        <a:rPr sz="975" b="1">
+                        <a:rPr sz="1050" b="1">
                           <a:solidFill>
                             <a:srgbClr val="FFFFFF"/>
                           </a:solidFill>
-                          <a:latin typeface="Microsoft YaHei"/>
-                          <a:ea typeface="Microsoft YaHei"/>
+                          <a:latin typeface="微软雅黑"/>
+                          <a:ea typeface="微软雅黑"/>
                         </a:rPr>
-                        <a:t>平均年化</a:t>
+                        <a:t>年化中位数</a:t>
                       </a:r>
-                      <a:endParaRPr/>
+                      <a:endParaRPr sz="1050" b="1">
+                        <a:solidFill>
+                          <a:srgbClr val="FFFFFF"/>
+                        </a:solidFill>
+                        <a:latin typeface="微软雅黑"/>
+                        <a:ea typeface="微软雅黑"/>
+                      </a:endParaRPr>
                     </a:p>
                   </a:txBody>
-                  <a:tcPr marL="45720" marR="45720" marT="45720" marB="45720" anchor="ctr">
+                  <a:tcPr marL="0" marR="0" marT="0" marB="0" anchor="ctr">
                     <a:lnL>
                       <a:noFill/>
                     </a:lnL>
@@ -2365,8 +2158,8 @@
                 </a:tc>
                 <a:tc>
                   <a:txBody>
-                    <a:bodyPr wrap="square" lIns="0" tIns="0" rIns="0" bIns="0" anchor="ctr">
-                      <a:normAutofit/>
+                    <a:bodyPr wrap="square">
+                      <a:spAutoFit/>
                     </a:bodyPr>
                     <a:p>
                       <a:pPr marL="114300" marR="114300" algn="l">
@@ -2375,19 +2168,25 @@
                         </a:lnSpc>
                       </a:pPr>
                       <a:r>
-                        <a:rPr sz="975" b="1">
+                        <a:rPr sz="1050" b="1">
                           <a:solidFill>
                             <a:srgbClr val="FFFFFF"/>
                           </a:solidFill>
-                          <a:latin typeface="Microsoft YaHei"/>
-                          <a:ea typeface="Microsoft YaHei"/>
+                          <a:latin typeface="微软雅黑"/>
+                          <a:ea typeface="微软雅黑"/>
                         </a:rPr>
-                        <a:t>年化中位数</a:t>
+                        <a:t>平均绝对收益</a:t>
                       </a:r>
-                      <a:endParaRPr/>
+                      <a:endParaRPr sz="1050" b="1">
+                        <a:solidFill>
+                          <a:srgbClr val="FFFFFF"/>
+                        </a:solidFill>
+                        <a:latin typeface="微软雅黑"/>
+                        <a:ea typeface="微软雅黑"/>
+                      </a:endParaRPr>
                     </a:p>
                   </a:txBody>
-                  <a:tcPr marL="45720" marR="45720" marT="45720" marB="45720" anchor="ctr">
+                  <a:tcPr marL="0" marR="0" marT="0" marB="0" anchor="ctr">
                     <a:lnL>
                       <a:noFill/>
                     </a:lnL>
@@ -2407,8 +2206,8 @@
                 </a:tc>
                 <a:tc>
                   <a:txBody>
-                    <a:bodyPr wrap="square" lIns="0" tIns="0" rIns="0" bIns="0" anchor="ctr">
-                      <a:normAutofit/>
+                    <a:bodyPr wrap="square">
+                      <a:spAutoFit/>
                     </a:bodyPr>
                     <a:p>
                       <a:pPr marL="114300" marR="114300" algn="l">
@@ -2417,19 +2216,25 @@
                         </a:lnSpc>
                       </a:pPr>
                       <a:r>
-                        <a:rPr sz="975" b="1">
+                        <a:rPr sz="1050" b="1">
                           <a:solidFill>
                             <a:srgbClr val="FFFFFF"/>
                           </a:solidFill>
-                          <a:latin typeface="Microsoft YaHei"/>
-                          <a:ea typeface="Microsoft YaHei"/>
+                          <a:latin typeface="微软雅黑"/>
+                          <a:ea typeface="微软雅黑"/>
                         </a:rPr>
-                        <a:t>平均绝对收益</a:t>
+                        <a:t>收益最高买入点</a:t>
                       </a:r>
-                      <a:endParaRPr/>
+                      <a:endParaRPr sz="1050" b="1">
+                        <a:solidFill>
+                          <a:srgbClr val="FFFFFF"/>
+                        </a:solidFill>
+                        <a:latin typeface="微软雅黑"/>
+                        <a:ea typeface="微软雅黑"/>
+                      </a:endParaRPr>
                     </a:p>
                   </a:txBody>
-                  <a:tcPr marL="45720" marR="45720" marT="45720" marB="45720" anchor="ctr">
+                  <a:tcPr marL="0" marR="0" marT="0" marB="0" anchor="ctr">
                     <a:lnL>
                       <a:noFill/>
                     </a:lnL>
@@ -2447,10 +2252,12 @@
                     </a:solidFill>
                   </a:tcPr>
                 </a:tc>
+              </a:tr>
+              <a:tr h="371475">
                 <a:tc>
                   <a:txBody>
-                    <a:bodyPr wrap="square" lIns="0" tIns="0" rIns="0" bIns="0" anchor="ctr">
-                      <a:normAutofit/>
+                    <a:bodyPr wrap="square">
+                      <a:spAutoFit/>
                     </a:bodyPr>
                     <a:p>
                       <a:pPr marL="114300" marR="114300" algn="l">
@@ -2459,19 +2266,25 @@
                         </a:lnSpc>
                       </a:pPr>
                       <a:r>
-                        <a:rPr sz="975" b="1">
+                        <a:rPr sz="1050" b="1">
                           <a:solidFill>
-                            <a:srgbClr val="FFFFFF"/>
+                            <a:srgbClr val="1A1D26"/>
                           </a:solidFill>
-                          <a:latin typeface="Microsoft YaHei"/>
-                          <a:ea typeface="Microsoft YaHei"/>
+                          <a:latin typeface="微软雅黑"/>
+                          <a:ea typeface="微软雅黑"/>
                         </a:rPr>
-                        <a:t>收益最高买入点</a:t>
+                        <a:t>半年</a:t>
                       </a:r>
-                      <a:endParaRPr/>
+                      <a:endParaRPr sz="1050" b="1">
+                        <a:solidFill>
+                          <a:srgbClr val="1A1D26"/>
+                        </a:solidFill>
+                        <a:latin typeface="微软雅黑"/>
+                        <a:ea typeface="微软雅黑"/>
+                      </a:endParaRPr>
                     </a:p>
                   </a:txBody>
-                  <a:tcPr marL="45720" marR="45720" marT="45720" marB="45720" anchor="ctr">
+                  <a:tcPr marL="0" marR="0" marT="0" marB="0" anchor="ctr">
                     <a:lnL>
                       <a:noFill/>
                     </a:lnL>
@@ -2484,22 +2297,12 @@
                     <a:lnB>
                       <a:noFill/>
                     </a:lnB>
-                    <a:solidFill>
-                      <a:srgbClr val="1F3A6E"/>
-                    </a:solidFill>
                   </a:tcPr>
                 </a:tc>
-                <a:extLst>
-                  <a:ext uri="{0D108BD9-81ED-4DB2-BD59-A6C34878D82A}">
-                    <a16:rowId val="1"/>
-                  </a:ext>
-                </a:extLst>
-              </a:tr>
-              <a:tr h="352425">
                 <a:tc>
                   <a:txBody>
-                    <a:bodyPr wrap="square" lIns="0" tIns="0" rIns="0" bIns="0" anchor="ctr">
-                      <a:normAutofit/>
+                    <a:bodyPr wrap="square">
+                      <a:spAutoFit/>
                     </a:bodyPr>
                     <a:p>
                       <a:pPr marL="114300" marR="114300" algn="l">
@@ -2508,19 +2311,25 @@
                         </a:lnSpc>
                       </a:pPr>
                       <a:r>
-                        <a:rPr sz="975" b="1">
+                        <a:rPr sz="1050" b="1">
                           <a:solidFill>
-                            <a:srgbClr val="1A1D26"/>
+                            <a:srgbClr val="D93636"/>
                           </a:solidFill>
-                          <a:latin typeface="Microsoft YaHei"/>
-                          <a:ea typeface="Microsoft YaHei"/>
+                          <a:latin typeface="微软雅黑"/>
+                          <a:ea typeface="微软雅黑"/>
                         </a:rPr>
-                        <a:t>半年</a:t>
+                        <a:t>94%</a:t>
                       </a:r>
-                      <a:endParaRPr/>
+                      <a:endParaRPr sz="1050" b="1">
+                        <a:solidFill>
+                          <a:srgbClr val="D93636"/>
+                        </a:solidFill>
+                        <a:latin typeface="微软雅黑"/>
+                        <a:ea typeface="微软雅黑"/>
+                      </a:endParaRPr>
                     </a:p>
                   </a:txBody>
-                  <a:tcPr marL="45720" marR="45720" marT="45720" marB="45720" anchor="ctr">
+                  <a:tcPr marL="0" marR="0" marT="0" marB="0" anchor="ctr">
                     <a:lnL>
                       <a:noFill/>
                     </a:lnL>
@@ -2537,8 +2346,8 @@
                 </a:tc>
                 <a:tc>
                   <a:txBody>
-                    <a:bodyPr wrap="square" lIns="0" tIns="0" rIns="0" bIns="0" anchor="ctr">
-                      <a:normAutofit/>
+                    <a:bodyPr wrap="square">
+                      <a:spAutoFit/>
                     </a:bodyPr>
                     <a:p>
                       <a:pPr marL="114300" marR="114300" algn="l">
@@ -2547,19 +2356,25 @@
                         </a:lnSpc>
                       </a:pPr>
                       <a:r>
-                        <a:rPr sz="975">
+                        <a:rPr sz="1050" b="1">
                           <a:solidFill>
-                            <a:srgbClr val="1A1D26"/>
+                            <a:srgbClr val="D93636"/>
                           </a:solidFill>
-                          <a:latin typeface="Microsoft YaHei"/>
-                          <a:ea typeface="Microsoft YaHei"/>
+                          <a:latin typeface="微软雅黑"/>
+                          <a:ea typeface="微软雅黑"/>
                         </a:rPr>
-                        <a:t>18</a:t>
+                        <a:t>+139.3%</a:t>
                       </a:r>
-                      <a:endParaRPr/>
+                      <a:endParaRPr sz="1050" b="1">
+                        <a:solidFill>
+                          <a:srgbClr val="D93636"/>
+                        </a:solidFill>
+                        <a:latin typeface="微软雅黑"/>
+                        <a:ea typeface="微软雅黑"/>
+                      </a:endParaRPr>
                     </a:p>
                   </a:txBody>
-                  <a:tcPr marL="45720" marR="45720" marT="45720" marB="45720" anchor="ctr">
+                  <a:tcPr marL="0" marR="0" marT="0" marB="0" anchor="ctr">
                     <a:lnL>
                       <a:noFill/>
                     </a:lnL>
@@ -2576,8 +2391,8 @@
                 </a:tc>
                 <a:tc>
                   <a:txBody>
-                    <a:bodyPr wrap="square" lIns="0" tIns="0" rIns="0" bIns="0" anchor="ctr">
-                      <a:normAutofit/>
+                    <a:bodyPr wrap="square">
+                      <a:spAutoFit/>
                     </a:bodyPr>
                     <a:p>
                       <a:pPr marL="114300" marR="114300" algn="l">
@@ -2586,19 +2401,25 @@
                         </a:lnSpc>
                       </a:pPr>
                       <a:r>
-                        <a:rPr sz="975">
+                        <a:rPr sz="1050">
                           <a:solidFill>
                             <a:srgbClr val="1A1D26"/>
                           </a:solidFill>
-                          <a:latin typeface="Microsoft YaHei"/>
-                          <a:ea typeface="Microsoft YaHei"/>
+                          <a:latin typeface="微软雅黑"/>
+                          <a:ea typeface="微软雅黑"/>
                         </a:rPr>
-                        <a:t>94%（17/18）</a:t>
+                        <a:t>+150.3%</a:t>
                       </a:r>
-                      <a:endParaRPr/>
+                      <a:endParaRPr sz="1050">
+                        <a:solidFill>
+                          <a:srgbClr val="1A1D26"/>
+                        </a:solidFill>
+                        <a:latin typeface="微软雅黑"/>
+                        <a:ea typeface="微软雅黑"/>
+                      </a:endParaRPr>
                     </a:p>
                   </a:txBody>
-                  <a:tcPr marL="45720" marR="45720" marT="45720" marB="45720" anchor="ctr">
+                  <a:tcPr marL="0" marR="0" marT="0" marB="0" anchor="ctr">
                     <a:lnL>
                       <a:noFill/>
                     </a:lnL>
@@ -2615,8 +2436,8 @@
                 </a:tc>
                 <a:tc>
                   <a:txBody>
-                    <a:bodyPr wrap="square" lIns="0" tIns="0" rIns="0" bIns="0" anchor="ctr">
-                      <a:normAutofit/>
+                    <a:bodyPr wrap="square">
+                      <a:spAutoFit/>
                     </a:bodyPr>
                     <a:p>
                       <a:pPr marL="114300" marR="114300" algn="l">
@@ -2625,19 +2446,25 @@
                         </a:lnSpc>
                       </a:pPr>
                       <a:r>
-                        <a:rPr sz="975" b="1">
+                        <a:rPr sz="1050">
                           <a:solidFill>
-                            <a:srgbClr val="D93636"/>
+                            <a:srgbClr val="1A1D26"/>
                           </a:solidFill>
-                          <a:latin typeface="Microsoft YaHei"/>
-                          <a:ea typeface="Microsoft YaHei"/>
+                          <a:latin typeface="微软雅黑"/>
+                          <a:ea typeface="微软雅黑"/>
                         </a:rPr>
-                        <a:t>+139.3%</a:t>
+                        <a:t>+50.6%</a:t>
                       </a:r>
-                      <a:endParaRPr/>
+                      <a:endParaRPr sz="1050">
+                        <a:solidFill>
+                          <a:srgbClr val="1A1D26"/>
+                        </a:solidFill>
+                        <a:latin typeface="微软雅黑"/>
+                        <a:ea typeface="微软雅黑"/>
+                      </a:endParaRPr>
                     </a:p>
                   </a:txBody>
-                  <a:tcPr marL="45720" marR="45720" marT="45720" marB="45720" anchor="ctr">
+                  <a:tcPr marL="0" marR="0" marT="0" marB="0" anchor="ctr">
                     <a:lnL>
                       <a:noFill/>
                     </a:lnL>
@@ -2654,8 +2481,8 @@
                 </a:tc>
                 <a:tc>
                   <a:txBody>
-                    <a:bodyPr wrap="square" lIns="0" tIns="0" rIns="0" bIns="0" anchor="ctr">
-                      <a:normAutofit/>
+                    <a:bodyPr wrap="square">
+                      <a:spAutoFit/>
                     </a:bodyPr>
                     <a:p>
                       <a:pPr marL="114300" marR="114300" algn="l">
@@ -2664,19 +2491,25 @@
                         </a:lnSpc>
                       </a:pPr>
                       <a:r>
-                        <a:rPr sz="975">
+                        <a:rPr sz="1050">
                           <a:solidFill>
                             <a:srgbClr val="1A1D26"/>
                           </a:solidFill>
-                          <a:latin typeface="Microsoft YaHei"/>
-                          <a:ea typeface="Microsoft YaHei"/>
+                          <a:latin typeface="微软雅黑"/>
+                          <a:ea typeface="微软雅黑"/>
                         </a:rPr>
-                        <a:t>+150.3%</a:t>
+                        <a:t>2025-04-07（+105.6%）</a:t>
                       </a:r>
-                      <a:endParaRPr/>
+                      <a:endParaRPr sz="1050">
+                        <a:solidFill>
+                          <a:srgbClr val="1A1D26"/>
+                        </a:solidFill>
+                        <a:latin typeface="微软雅黑"/>
+                        <a:ea typeface="微软雅黑"/>
+                      </a:endParaRPr>
                     </a:p>
                   </a:txBody>
-                  <a:tcPr marL="45720" marR="45720" marT="45720" marB="45720" anchor="ctr">
+                  <a:tcPr marL="0" marR="0" marT="0" marB="0" anchor="ctr">
                     <a:lnL>
                       <a:noFill/>
                     </a:lnL>
@@ -2691,10 +2524,12 @@
                     </a:lnB>
                   </a:tcPr>
                 </a:tc>
+              </a:tr>
+              <a:tr h="371475">
                 <a:tc>
                   <a:txBody>
-                    <a:bodyPr wrap="square" lIns="0" tIns="0" rIns="0" bIns="0" anchor="ctr">
-                      <a:normAutofit/>
+                    <a:bodyPr wrap="square">
+                      <a:spAutoFit/>
                     </a:bodyPr>
                     <a:p>
                       <a:pPr marL="114300" marR="114300" algn="l">
@@ -2703,19 +2538,25 @@
                         </a:lnSpc>
                       </a:pPr>
                       <a:r>
-                        <a:rPr sz="975">
+                        <a:rPr sz="1050" b="1">
                           <a:solidFill>
                             <a:srgbClr val="1A1D26"/>
                           </a:solidFill>
-                          <a:latin typeface="Microsoft YaHei"/>
-                          <a:ea typeface="Microsoft YaHei"/>
+                          <a:latin typeface="微软雅黑"/>
+                          <a:ea typeface="微软雅黑"/>
                         </a:rPr>
-                        <a:t>+50.6%</a:t>
+                        <a:t>一年</a:t>
                       </a:r>
-                      <a:endParaRPr/>
+                      <a:endParaRPr sz="1050" b="1">
+                        <a:solidFill>
+                          <a:srgbClr val="1A1D26"/>
+                        </a:solidFill>
+                        <a:latin typeface="微软雅黑"/>
+                        <a:ea typeface="微软雅黑"/>
+                      </a:endParaRPr>
                     </a:p>
                   </a:txBody>
-                  <a:tcPr marL="45720" marR="45720" marT="45720" marB="45720" anchor="ctr">
+                  <a:tcPr marL="0" marR="0" marT="0" marB="0" anchor="ctr">
                     <a:lnL>
                       <a:noFill/>
                     </a:lnL>
@@ -2728,12 +2569,15 @@
                     <a:lnB>
                       <a:noFill/>
                     </a:lnB>
+                    <a:solidFill>
+                      <a:srgbClr val="F7F9FC"/>
+                    </a:solidFill>
                   </a:tcPr>
                 </a:tc>
                 <a:tc>
                   <a:txBody>
-                    <a:bodyPr wrap="square" lIns="0" tIns="0" rIns="0" bIns="0" anchor="ctr">
-                      <a:normAutofit/>
+                    <a:bodyPr wrap="square">
+                      <a:spAutoFit/>
                     </a:bodyPr>
                     <a:p>
                       <a:pPr marL="114300" marR="114300" algn="l">
@@ -2742,19 +2586,25 @@
                         </a:lnSpc>
                       </a:pPr>
                       <a:r>
-                        <a:rPr sz="975">
+                        <a:rPr sz="1050" b="1">
                           <a:solidFill>
-                            <a:srgbClr val="1A1D26"/>
+                            <a:srgbClr val="D93636"/>
                           </a:solidFill>
-                          <a:latin typeface="Microsoft YaHei"/>
-                          <a:ea typeface="Microsoft YaHei"/>
+                          <a:latin typeface="微软雅黑"/>
+                          <a:ea typeface="微软雅黑"/>
                         </a:rPr>
-                        <a:t>2025-04-07（+105.6%）</a:t>
+                        <a:t>94%</a:t>
                       </a:r>
-                      <a:endParaRPr/>
+                      <a:endParaRPr sz="1050" b="1">
+                        <a:solidFill>
+                          <a:srgbClr val="D93636"/>
+                        </a:solidFill>
+                        <a:latin typeface="微软雅黑"/>
+                        <a:ea typeface="微软雅黑"/>
+                      </a:endParaRPr>
                     </a:p>
                   </a:txBody>
-                  <a:tcPr marL="45720" marR="45720" marT="45720" marB="45720" anchor="ctr">
+                  <a:tcPr marL="0" marR="0" marT="0" marB="0" anchor="ctr">
                     <a:lnL>
                       <a:noFill/>
                     </a:lnL>
@@ -2767,19 +2617,15 @@
                     <a:lnB>
                       <a:noFill/>
                     </a:lnB>
+                    <a:solidFill>
+                      <a:srgbClr val="F7F9FC"/>
+                    </a:solidFill>
                   </a:tcPr>
                 </a:tc>
-                <a:extLst>
-                  <a:ext uri="{0D108BD9-81ED-4DB2-BD59-A6C34878D82A}">
-                    <a16:rowId val="2"/>
-                  </a:ext>
-                </a:extLst>
-              </a:tr>
-              <a:tr h="352425">
                 <a:tc>
                   <a:txBody>
-                    <a:bodyPr wrap="square" lIns="0" tIns="0" rIns="0" bIns="0" anchor="ctr">
-                      <a:normAutofit/>
+                    <a:bodyPr wrap="square">
+                      <a:spAutoFit/>
                     </a:bodyPr>
                     <a:p>
                       <a:pPr marL="114300" marR="114300" algn="l">
@@ -2788,19 +2634,25 @@
                         </a:lnSpc>
                       </a:pPr>
                       <a:r>
-                        <a:rPr sz="975" b="1">
+                        <a:rPr sz="1050" b="1">
                           <a:solidFill>
-                            <a:srgbClr val="1A1D26"/>
+                            <a:srgbClr val="D93636"/>
                           </a:solidFill>
-                          <a:latin typeface="Microsoft YaHei"/>
-                          <a:ea typeface="Microsoft YaHei"/>
+                          <a:latin typeface="微软雅黑"/>
+                          <a:ea typeface="微软雅黑"/>
                         </a:rPr>
-                        <a:t>一年</a:t>
+                        <a:t>+98.6%</a:t>
                       </a:r>
-                      <a:endParaRPr/>
+                      <a:endParaRPr sz="1050" b="1">
+                        <a:solidFill>
+                          <a:srgbClr val="D93636"/>
+                        </a:solidFill>
+                        <a:latin typeface="微软雅黑"/>
+                        <a:ea typeface="微软雅黑"/>
+                      </a:endParaRPr>
                     </a:p>
                   </a:txBody>
-                  <a:tcPr marL="45720" marR="45720" marT="45720" marB="45720" anchor="ctr">
+                  <a:tcPr marL="0" marR="0" marT="0" marB="0" anchor="ctr">
                     <a:lnL>
                       <a:noFill/>
                     </a:lnL>
@@ -2820,8 +2672,8 @@
                 </a:tc>
                 <a:tc>
                   <a:txBody>
-                    <a:bodyPr wrap="square" lIns="0" tIns="0" rIns="0" bIns="0" anchor="ctr">
-                      <a:normAutofit/>
+                    <a:bodyPr wrap="square">
+                      <a:spAutoFit/>
                     </a:bodyPr>
                     <a:p>
                       <a:pPr marL="114300" marR="114300" algn="l">
@@ -2830,19 +2682,25 @@
                         </a:lnSpc>
                       </a:pPr>
                       <a:r>
-                        <a:rPr sz="975">
+                        <a:rPr sz="1050">
                           <a:solidFill>
                             <a:srgbClr val="1A1D26"/>
                           </a:solidFill>
-                          <a:latin typeface="Microsoft YaHei"/>
-                          <a:ea typeface="Microsoft YaHei"/>
+                          <a:latin typeface="微软雅黑"/>
+                          <a:ea typeface="微软雅黑"/>
                         </a:rPr>
-                        <a:t>18</a:t>
+                        <a:t>+98.5%</a:t>
                       </a:r>
-                      <a:endParaRPr/>
+                      <a:endParaRPr sz="1050">
+                        <a:solidFill>
+                          <a:srgbClr val="1A1D26"/>
+                        </a:solidFill>
+                        <a:latin typeface="微软雅黑"/>
+                        <a:ea typeface="微软雅黑"/>
+                      </a:endParaRPr>
                     </a:p>
                   </a:txBody>
-                  <a:tcPr marL="45720" marR="45720" marT="45720" marB="45720" anchor="ctr">
+                  <a:tcPr marL="0" marR="0" marT="0" marB="0" anchor="ctr">
                     <a:lnL>
                       <a:noFill/>
                     </a:lnL>
@@ -2862,8 +2720,8 @@
                 </a:tc>
                 <a:tc>
                   <a:txBody>
-                    <a:bodyPr wrap="square" lIns="0" tIns="0" rIns="0" bIns="0" anchor="ctr">
-                      <a:normAutofit/>
+                    <a:bodyPr wrap="square">
+                      <a:spAutoFit/>
                     </a:bodyPr>
                     <a:p>
                       <a:pPr marL="114300" marR="114300" algn="l">
@@ -2872,19 +2730,25 @@
                         </a:lnSpc>
                       </a:pPr>
                       <a:r>
-                        <a:rPr sz="975">
+                        <a:rPr sz="1050">
                           <a:solidFill>
                             <a:srgbClr val="1A1D26"/>
                           </a:solidFill>
-                          <a:latin typeface="Microsoft YaHei"/>
-                          <a:ea typeface="Microsoft YaHei"/>
+                          <a:latin typeface="微软雅黑"/>
+                          <a:ea typeface="微软雅黑"/>
                         </a:rPr>
-                        <a:t>94%（17/18）</a:t>
+                        <a:t>+98.4%</a:t>
                       </a:r>
-                      <a:endParaRPr/>
+                      <a:endParaRPr sz="1050">
+                        <a:solidFill>
+                          <a:srgbClr val="1A1D26"/>
+                        </a:solidFill>
+                        <a:latin typeface="微软雅黑"/>
+                        <a:ea typeface="微软雅黑"/>
+                      </a:endParaRPr>
                     </a:p>
                   </a:txBody>
-                  <a:tcPr marL="45720" marR="45720" marT="45720" marB="45720" anchor="ctr">
+                  <a:tcPr marL="0" marR="0" marT="0" marB="0" anchor="ctr">
                     <a:lnL>
                       <a:noFill/>
                     </a:lnL>
@@ -2904,8 +2768,8 @@
                 </a:tc>
                 <a:tc>
                   <a:txBody>
-                    <a:bodyPr wrap="square" lIns="0" tIns="0" rIns="0" bIns="0" anchor="ctr">
-                      <a:normAutofit/>
+                    <a:bodyPr wrap="square">
+                      <a:spAutoFit/>
                     </a:bodyPr>
                     <a:p>
                       <a:pPr marL="114300" marR="114300" algn="l">
@@ -2914,19 +2778,25 @@
                         </a:lnSpc>
                       </a:pPr>
                       <a:r>
-                        <a:rPr sz="975" b="1">
+                        <a:rPr sz="1050">
                           <a:solidFill>
-                            <a:srgbClr val="D93636"/>
+                            <a:srgbClr val="1A1D26"/>
                           </a:solidFill>
-                          <a:latin typeface="Microsoft YaHei"/>
-                          <a:ea typeface="Microsoft YaHei"/>
+                          <a:latin typeface="微软雅黑"/>
+                          <a:ea typeface="微软雅黑"/>
                         </a:rPr>
-                        <a:t>+98.6%</a:t>
+                        <a:t>2025-06-20（+224.6%）</a:t>
                       </a:r>
-                      <a:endParaRPr/>
+                      <a:endParaRPr sz="1050">
+                        <a:solidFill>
+                          <a:srgbClr val="1A1D26"/>
+                        </a:solidFill>
+                        <a:latin typeface="微软雅黑"/>
+                        <a:ea typeface="微软雅黑"/>
+                      </a:endParaRPr>
                     </a:p>
                   </a:txBody>
-                  <a:tcPr marL="45720" marR="45720" marT="45720" marB="45720" anchor="ctr">
+                  <a:tcPr marL="0" marR="0" marT="0" marB="0" anchor="ctr">
                     <a:lnL>
                       <a:noFill/>
                     </a:lnL>
@@ -2944,10 +2814,12 @@
                     </a:solidFill>
                   </a:tcPr>
                 </a:tc>
+              </a:tr>
+              <a:tr h="371475">
                 <a:tc>
                   <a:txBody>
-                    <a:bodyPr wrap="square" lIns="0" tIns="0" rIns="0" bIns="0" anchor="ctr">
-                      <a:normAutofit/>
+                    <a:bodyPr wrap="square">
+                      <a:spAutoFit/>
                     </a:bodyPr>
                     <a:p>
                       <a:pPr marL="114300" marR="114300" algn="l">
@@ -2956,19 +2828,25 @@
                         </a:lnSpc>
                       </a:pPr>
                       <a:r>
-                        <a:rPr sz="975">
+                        <a:rPr sz="1050" b="1">
                           <a:solidFill>
                             <a:srgbClr val="1A1D26"/>
                           </a:solidFill>
-                          <a:latin typeface="Microsoft YaHei"/>
-                          <a:ea typeface="Microsoft YaHei"/>
+                          <a:latin typeface="微软雅黑"/>
+                          <a:ea typeface="微软雅黑"/>
                         </a:rPr>
-                        <a:t>+98.5%</a:t>
+                        <a:t>两年</a:t>
                       </a:r>
-                      <a:endParaRPr/>
+                      <a:endParaRPr sz="1050" b="1">
+                        <a:solidFill>
+                          <a:srgbClr val="1A1D26"/>
+                        </a:solidFill>
+                        <a:latin typeface="微软雅黑"/>
+                        <a:ea typeface="微软雅黑"/>
+                      </a:endParaRPr>
                     </a:p>
                   </a:txBody>
-                  <a:tcPr marL="45720" marR="45720" marT="45720" marB="45720" anchor="ctr">
+                  <a:tcPr marL="0" marR="0" marT="0" marB="0" anchor="ctr">
                     <a:lnL>
                       <a:noFill/>
                     </a:lnL>
@@ -2981,15 +2859,12 @@
                     <a:lnB>
                       <a:noFill/>
                     </a:lnB>
-                    <a:solidFill>
-                      <a:srgbClr val="F7F9FC"/>
-                    </a:solidFill>
                   </a:tcPr>
                 </a:tc>
                 <a:tc>
                   <a:txBody>
-                    <a:bodyPr wrap="square" lIns="0" tIns="0" rIns="0" bIns="0" anchor="ctr">
-                      <a:normAutofit/>
+                    <a:bodyPr wrap="square">
+                      <a:spAutoFit/>
                     </a:bodyPr>
                     <a:p>
                       <a:pPr marL="114300" marR="114300" algn="l">
@@ -2998,19 +2873,25 @@
                         </a:lnSpc>
                       </a:pPr>
                       <a:r>
-                        <a:rPr sz="975">
+                        <a:rPr sz="1050" b="1">
                           <a:solidFill>
-                            <a:srgbClr val="1A1D26"/>
+                            <a:srgbClr val="D93636"/>
                           </a:solidFill>
-                          <a:latin typeface="Microsoft YaHei"/>
-                          <a:ea typeface="Microsoft YaHei"/>
+                          <a:latin typeface="微软雅黑"/>
+                          <a:ea typeface="微软雅黑"/>
                         </a:rPr>
-                        <a:t>+98.4%</a:t>
+                        <a:t>100%</a:t>
                       </a:r>
-                      <a:endParaRPr/>
+                      <a:endParaRPr sz="1050" b="1">
+                        <a:solidFill>
+                          <a:srgbClr val="D93636"/>
+                        </a:solidFill>
+                        <a:latin typeface="微软雅黑"/>
+                        <a:ea typeface="微软雅黑"/>
+                      </a:endParaRPr>
                     </a:p>
                   </a:txBody>
-                  <a:tcPr marL="45720" marR="45720" marT="45720" marB="45720" anchor="ctr">
+                  <a:tcPr marL="0" marR="0" marT="0" marB="0" anchor="ctr">
                     <a:lnL>
                       <a:noFill/>
                     </a:lnL>
@@ -3023,15 +2904,12 @@
                     <a:lnB>
                       <a:noFill/>
                     </a:lnB>
-                    <a:solidFill>
-                      <a:srgbClr val="F7F9FC"/>
-                    </a:solidFill>
                   </a:tcPr>
                 </a:tc>
                 <a:tc>
                   <a:txBody>
-                    <a:bodyPr wrap="square" lIns="0" tIns="0" rIns="0" bIns="0" anchor="ctr">
-                      <a:normAutofit/>
+                    <a:bodyPr wrap="square">
+                      <a:spAutoFit/>
                     </a:bodyPr>
                     <a:p>
                       <a:pPr marL="114300" marR="114300" algn="l">
@@ -3040,19 +2918,25 @@
                         </a:lnSpc>
                       </a:pPr>
                       <a:r>
-                        <a:rPr sz="975">
+                        <a:rPr sz="1050" b="1">
                           <a:solidFill>
-                            <a:srgbClr val="1A1D26"/>
+                            <a:srgbClr val="D93636"/>
                           </a:solidFill>
-                          <a:latin typeface="Microsoft YaHei"/>
-                          <a:ea typeface="Microsoft YaHei"/>
+                          <a:latin typeface="微软雅黑"/>
+                          <a:ea typeface="微软雅黑"/>
                         </a:rPr>
-                        <a:t>2025-06-20（+224.6%）</a:t>
+                        <a:t>+63.9%</a:t>
                       </a:r>
-                      <a:endParaRPr/>
+                      <a:endParaRPr sz="1050" b="1">
+                        <a:solidFill>
+                          <a:srgbClr val="D93636"/>
+                        </a:solidFill>
+                        <a:latin typeface="微软雅黑"/>
+                        <a:ea typeface="微软雅黑"/>
+                      </a:endParaRPr>
                     </a:p>
                   </a:txBody>
-                  <a:tcPr marL="45720" marR="45720" marT="45720" marB="45720" anchor="ctr">
+                  <a:tcPr marL="0" marR="0" marT="0" marB="0" anchor="ctr">
                     <a:lnL>
                       <a:noFill/>
                     </a:lnL>
@@ -3065,22 +2949,12 @@
                     <a:lnB>
                       <a:noFill/>
                     </a:lnB>
-                    <a:solidFill>
-                      <a:srgbClr val="F7F9FC"/>
-                    </a:solidFill>
                   </a:tcPr>
                 </a:tc>
-                <a:extLst>
-                  <a:ext uri="{0D108BD9-81ED-4DB2-BD59-A6C34878D82A}">
-                    <a16:rowId val="3"/>
-                  </a:ext>
-                </a:extLst>
-              </a:tr>
-              <a:tr h="352425">
                 <a:tc>
                   <a:txBody>
-                    <a:bodyPr wrap="square" lIns="0" tIns="0" rIns="0" bIns="0" anchor="ctr">
-                      <a:normAutofit/>
+                    <a:bodyPr wrap="square">
+                      <a:spAutoFit/>
                     </a:bodyPr>
                     <a:p>
                       <a:pPr marL="114300" marR="114300" algn="l">
@@ -3089,19 +2963,25 @@
                         </a:lnSpc>
                       </a:pPr>
                       <a:r>
-                        <a:rPr sz="975" b="1">
+                        <a:rPr sz="1050">
                           <a:solidFill>
                             <a:srgbClr val="1A1D26"/>
                           </a:solidFill>
-                          <a:latin typeface="Microsoft YaHei"/>
-                          <a:ea typeface="Microsoft YaHei"/>
+                          <a:latin typeface="微软雅黑"/>
+                          <a:ea typeface="微软雅黑"/>
                         </a:rPr>
-                        <a:t>两年</a:t>
+                        <a:t>+69.6%</a:t>
                       </a:r>
-                      <a:endParaRPr/>
+                      <a:endParaRPr sz="1050">
+                        <a:solidFill>
+                          <a:srgbClr val="1A1D26"/>
+                        </a:solidFill>
+                        <a:latin typeface="微软雅黑"/>
+                        <a:ea typeface="微软雅黑"/>
+                      </a:endParaRPr>
                     </a:p>
                   </a:txBody>
-                  <a:tcPr marL="45720" marR="45720" marT="45720" marB="45720" anchor="ctr">
+                  <a:tcPr marL="0" marR="0" marT="0" marB="0" anchor="ctr">
                     <a:lnL>
                       <a:noFill/>
                     </a:lnL>
@@ -3118,8 +2998,8 @@
                 </a:tc>
                 <a:tc>
                   <a:txBody>
-                    <a:bodyPr wrap="square" lIns="0" tIns="0" rIns="0" bIns="0" anchor="ctr">
-                      <a:normAutofit/>
+                    <a:bodyPr wrap="square">
+                      <a:spAutoFit/>
                     </a:bodyPr>
                     <a:p>
                       <a:pPr marL="114300" marR="114300" algn="l">
@@ -3128,19 +3008,25 @@
                         </a:lnSpc>
                       </a:pPr>
                       <a:r>
-                        <a:rPr sz="975">
+                        <a:rPr sz="1050">
                           <a:solidFill>
                             <a:srgbClr val="1A1D26"/>
                           </a:solidFill>
-                          <a:latin typeface="Microsoft YaHei"/>
-                          <a:ea typeface="Microsoft YaHei"/>
+                          <a:latin typeface="微软雅黑"/>
+                          <a:ea typeface="微软雅黑"/>
                         </a:rPr>
-                        <a:t>9</a:t>
+                        <a:t>+171.1%</a:t>
                       </a:r>
-                      <a:endParaRPr/>
+                      <a:endParaRPr sz="1050">
+                        <a:solidFill>
+                          <a:srgbClr val="1A1D26"/>
+                        </a:solidFill>
+                        <a:latin typeface="微软雅黑"/>
+                        <a:ea typeface="微软雅黑"/>
+                      </a:endParaRPr>
                     </a:p>
                   </a:txBody>
-                  <a:tcPr marL="45720" marR="45720" marT="45720" marB="45720" anchor="ctr">
+                  <a:tcPr marL="0" marR="0" marT="0" marB="0" anchor="ctr">
                     <a:lnL>
                       <a:noFill/>
                     </a:lnL>
@@ -3157,8 +3043,8 @@
                 </a:tc>
                 <a:tc>
                   <a:txBody>
-                    <a:bodyPr wrap="square" lIns="0" tIns="0" rIns="0" bIns="0" anchor="ctr">
-                      <a:normAutofit/>
+                    <a:bodyPr wrap="square">
+                      <a:spAutoFit/>
                     </a:bodyPr>
                     <a:p>
                       <a:pPr marL="114300" marR="114300" algn="l">
@@ -3167,19 +3053,25 @@
                         </a:lnSpc>
                       </a:pPr>
                       <a:r>
-                        <a:rPr sz="975" b="1">
+                        <a:rPr sz="1050">
                           <a:solidFill>
                             <a:srgbClr val="1A1D26"/>
                           </a:solidFill>
-                          <a:latin typeface="Microsoft YaHei"/>
-                          <a:ea typeface="Microsoft YaHei"/>
+                          <a:latin typeface="微软雅黑"/>
+                          <a:ea typeface="微软雅黑"/>
                         </a:rPr>
-                        <a:t>100%（9/9）</a:t>
+                        <a:t>2024-05-29（+243.4%）</a:t>
                       </a:r>
-                      <a:endParaRPr/>
+                      <a:endParaRPr sz="1050">
+                        <a:solidFill>
+                          <a:srgbClr val="1A1D26"/>
+                        </a:solidFill>
+                        <a:latin typeface="微软雅黑"/>
+                        <a:ea typeface="微软雅黑"/>
+                      </a:endParaRPr>
                     </a:p>
                   </a:txBody>
-                  <a:tcPr marL="45720" marR="45720" marT="45720" marB="45720" anchor="ctr">
+                  <a:tcPr marL="0" marR="0" marT="0" marB="0" anchor="ctr">
                     <a:lnL>
                       <a:noFill/>
                     </a:lnL>
@@ -3194,167 +3086,6 @@
                     </a:lnB>
                   </a:tcPr>
                 </a:tc>
-                <a:tc>
-                  <a:txBody>
-                    <a:bodyPr wrap="square" lIns="0" tIns="0" rIns="0" bIns="0" anchor="ctr">
-                      <a:normAutofit/>
-                    </a:bodyPr>
-                    <a:p>
-                      <a:pPr marL="114300" marR="114300" algn="l">
-                        <a:lnSpc>
-                          <a:spcPct val="120000"/>
-                        </a:lnSpc>
-                      </a:pPr>
-                      <a:r>
-                        <a:rPr sz="975" b="1">
-                          <a:solidFill>
-                            <a:srgbClr val="D93636"/>
-                          </a:solidFill>
-                          <a:latin typeface="Microsoft YaHei"/>
-                          <a:ea typeface="Microsoft YaHei"/>
-                        </a:rPr>
-                        <a:t>+63.9%</a:t>
-                      </a:r>
-                      <a:endParaRPr/>
-                    </a:p>
-                  </a:txBody>
-                  <a:tcPr marL="45720" marR="45720" marT="45720" marB="45720" anchor="ctr">
-                    <a:lnL>
-                      <a:noFill/>
-                    </a:lnL>
-                    <a:lnR>
-                      <a:noFill/>
-                    </a:lnR>
-                    <a:lnT>
-                      <a:noFill/>
-                    </a:lnT>
-                    <a:lnB>
-                      <a:noFill/>
-                    </a:lnB>
-                  </a:tcPr>
-                </a:tc>
-                <a:tc>
-                  <a:txBody>
-                    <a:bodyPr wrap="square" lIns="0" tIns="0" rIns="0" bIns="0" anchor="ctr">
-                      <a:normAutofit/>
-                    </a:bodyPr>
-                    <a:p>
-                      <a:pPr marL="114300" marR="114300" algn="l">
-                        <a:lnSpc>
-                          <a:spcPct val="120000"/>
-                        </a:lnSpc>
-                      </a:pPr>
-                      <a:r>
-                        <a:rPr sz="975">
-                          <a:solidFill>
-                            <a:srgbClr val="1A1D26"/>
-                          </a:solidFill>
-                          <a:latin typeface="Microsoft YaHei"/>
-                          <a:ea typeface="Microsoft YaHei"/>
-                        </a:rPr>
-                        <a:t>+69.6%</a:t>
-                      </a:r>
-                      <a:endParaRPr/>
-                    </a:p>
-                  </a:txBody>
-                  <a:tcPr marL="45720" marR="45720" marT="45720" marB="45720" anchor="ctr">
-                    <a:lnL>
-                      <a:noFill/>
-                    </a:lnL>
-                    <a:lnR>
-                      <a:noFill/>
-                    </a:lnR>
-                    <a:lnT>
-                      <a:noFill/>
-                    </a:lnT>
-                    <a:lnB>
-                      <a:noFill/>
-                    </a:lnB>
-                  </a:tcPr>
-                </a:tc>
-                <a:tc>
-                  <a:txBody>
-                    <a:bodyPr wrap="square" lIns="0" tIns="0" rIns="0" bIns="0" anchor="ctr">
-                      <a:normAutofit/>
-                    </a:bodyPr>
-                    <a:p>
-                      <a:pPr marL="114300" marR="114300" algn="l">
-                        <a:lnSpc>
-                          <a:spcPct val="120000"/>
-                        </a:lnSpc>
-                      </a:pPr>
-                      <a:r>
-                        <a:rPr sz="975">
-                          <a:solidFill>
-                            <a:srgbClr val="1A1D26"/>
-                          </a:solidFill>
-                          <a:latin typeface="Microsoft YaHei"/>
-                          <a:ea typeface="Microsoft YaHei"/>
-                        </a:rPr>
-                        <a:t>+171.1%</a:t>
-                      </a:r>
-                      <a:endParaRPr/>
-                    </a:p>
-                  </a:txBody>
-                  <a:tcPr marL="45720" marR="45720" marT="45720" marB="45720" anchor="ctr">
-                    <a:lnL>
-                      <a:noFill/>
-                    </a:lnL>
-                    <a:lnR>
-                      <a:noFill/>
-                    </a:lnR>
-                    <a:lnT>
-                      <a:noFill/>
-                    </a:lnT>
-                    <a:lnB>
-                      <a:noFill/>
-                    </a:lnB>
-                  </a:tcPr>
-                </a:tc>
-                <a:tc>
-                  <a:txBody>
-                    <a:bodyPr wrap="square" lIns="0" tIns="0" rIns="0" bIns="0" anchor="ctr">
-                      <a:normAutofit/>
-                    </a:bodyPr>
-                    <a:p>
-                      <a:pPr marL="114300" marR="114300" algn="l">
-                        <a:lnSpc>
-                          <a:spcPct val="120000"/>
-                        </a:lnSpc>
-                      </a:pPr>
-                      <a:r>
-                        <a:rPr sz="975">
-                          <a:solidFill>
-                            <a:srgbClr val="1A1D26"/>
-                          </a:solidFill>
-                          <a:latin typeface="Microsoft YaHei"/>
-                          <a:ea typeface="Microsoft YaHei"/>
-                        </a:rPr>
-                        <a:t>2024-05-29（+243.4%）</a:t>
-                      </a:r>
-                      <a:endParaRPr/>
-                    </a:p>
-                  </a:txBody>
-                  <a:tcPr marL="45720" marR="45720" marT="45720" marB="45720" anchor="ctr">
-                    <a:lnL>
-                      <a:noFill/>
-                    </a:lnL>
-                    <a:lnR>
-                      <a:noFill/>
-                    </a:lnR>
-                    <a:lnT>
-                      <a:noFill/>
-                    </a:lnT>
-                    <a:lnB>
-                      <a:noFill/>
-                    </a:lnB>
-                  </a:tcPr>
-                </a:tc>
-                <a:extLst>
-                  <a:ext uri="{0D108BD9-81ED-4DB2-BD59-A6C34878D82A}">
-                    <a16:rowId val="4"/>
-                  </a:ext>
-                </a:extLst>
               </a:tr>
             </a:tbl>
           </a:graphicData>
@@ -3362,160 +3093,12 @@
       </p:graphicFrame>
       <p:sp>
         <p:nvSpPr>
-          <p:cNvPr id="35" name=""/>
+          <p:cNvPr id="31" name="矩形 30"/>
           <p:cNvSpPr/>
           <p:nvPr/>
         </p:nvSpPr>
         <p:spPr>
-          <a:xfrm rot="0" flipH="0" flipV="0">
-            <a:off x="571500" y="5991225"/>
-            <a:ext cx="11049000" cy="571500"/>
-          </a:xfrm>
-          <a:prstGeom prst="roundRect">
-            <a:avLst>
-              <a:gd name="adj" fmla="val 16667"/>
-            </a:avLst>
-          </a:prstGeom>
-          <a:solidFill>
-            <a:srgbClr val="FFFAF0"/>
-          </a:solidFill>
-          <a:ln w="12700">
-            <a:solidFill>
-              <a:srgbClr val="F6E0B5"/>
-            </a:solidFill>
-            <a:prstDash val="solid"/>
-          </a:ln>
-        </p:spPr>
-        <p:txBody>
-          <a:bodyPr/>
-          <a:p/>
-        </p:txBody>
-      </p:sp>
-      <p:sp>
-        <p:nvSpPr>
-          <p:cNvPr id="36" name="" descr="{&quot;isTemplate&quot;:true,&quot;type&quot;:&quot;text&quot;}"/>
-          <p:cNvSpPr txBox="1"/>
-          <p:nvPr/>
-        </p:nvSpPr>
-        <p:spPr>
-          <a:xfrm rot="0" flipH="0" flipV="0">
-            <a:off x="742950" y="6067425"/>
-            <a:ext cx="10706100" cy="419100"/>
-          </a:xfrm>
-          <a:prstGeom prst="rect"/>
-        </p:spPr>
-        <p:txBody>
-          <a:bodyPr wrap="square" lIns="0" tIns="0" rIns="0" bIns="0">
-            <a:normAutofit/>
-          </a:bodyPr>
-          <a:p>
-            <a:pPr>
-              <a:lnSpc>
-                <a:spcPct val="150000"/>
-              </a:lnSpc>
-            </a:pPr>
-            <a:r>
-              <a:rPr lang="zh-CN" sz="900">
-                <a:solidFill>
-                  <a:srgbClr val="7A5A20"/>
-                </a:solidFill>
-                <a:latin typeface="PingFang SC"/>
-                <a:ea typeface="PingFang SC"/>
-              </a:rPr>
-              <a:t>最佳买点集中在恐慌最深处（</a:t>
-            </a:r>
-            <a:r>
-              <a:rPr lang="en-US" sz="900">
-                <a:solidFill>
-                  <a:srgbClr val="7A5A20"/>
-                </a:solidFill>
-                <a:latin typeface="PingFang SC"/>
-                <a:ea typeface="PingFang SC"/>
-              </a:rPr>
-              <a:t xml:space="preserve">2025-04 </a:t>
-            </a:r>
-            <a:r>
-              <a:rPr lang="zh-CN" sz="900">
-                <a:solidFill>
-                  <a:srgbClr val="7A5A20"/>
-                </a:solidFill>
-                <a:latin typeface="PingFang SC"/>
-                <a:ea typeface="PingFang SC"/>
-              </a:rPr>
-              <a:t>关税冲击）与牛市前磨底期（</a:t>
-            </a:r>
-            <a:r>
-              <a:rPr lang="en-US" sz="900">
-                <a:solidFill>
-                  <a:srgbClr val="7A5A20"/>
-                </a:solidFill>
-                <a:latin typeface="PingFang SC"/>
-                <a:ea typeface="PingFang SC"/>
-              </a:rPr>
-              <a:t>2024-04~05</a:t>
-            </a:r>
-            <a:r>
-              <a:rPr lang="zh-CN" sz="900">
-                <a:solidFill>
-                  <a:srgbClr val="7A5A20"/>
-                </a:solidFill>
-                <a:latin typeface="PingFang SC"/>
-                <a:ea typeface="PingFang SC"/>
-              </a:rPr>
-              <a:t>）；持有越久总收益越高、年化越低。注意：</a:t>
-            </a:r>
-            <a:r>
-              <a:rPr lang="en-US" sz="900">
-                <a:solidFill>
-                  <a:srgbClr val="7A5A20"/>
-                </a:solidFill>
-                <a:latin typeface="PingFang SC"/>
-                <a:ea typeface="PingFang SC"/>
-              </a:rPr>
-              <a:t xml:space="preserve">21 </a:t>
-            </a:r>
-            <a:r>
-              <a:rPr lang="zh-CN" sz="900">
-                <a:solidFill>
-                  <a:srgbClr val="7A5A20"/>
-                </a:solidFill>
-                <a:latin typeface="PingFang SC"/>
-                <a:ea typeface="PingFang SC"/>
-              </a:rPr>
-              <a:t>次信号仅来自</a:t>
-            </a:r>
-            <a:r>
-              <a:rPr lang="en-US" sz="900">
-                <a:solidFill>
-                  <a:srgbClr val="7A5A20"/>
-                </a:solidFill>
-                <a:latin typeface="PingFang SC"/>
-                <a:ea typeface="PingFang SC"/>
-              </a:rPr>
-              <a:t xml:space="preserve"> 3 </a:t>
-            </a:r>
-            <a:r>
-              <a:rPr lang="zh-CN" sz="900">
-                <a:solidFill>
-                  <a:srgbClr val="7A5A20"/>
-                </a:solidFill>
-                <a:latin typeface="PingFang SC"/>
-                <a:ea typeface="PingFang SC"/>
-              </a:rPr>
-              <a:t>个低温带且持仓期高度重叠，胜率不能视作独立重复胜率；模拟组合回测，未计申赎费与冲击成本。</a:t>
-            </a:r>
-            <a:endParaRPr/>
-          </a:p>
-        </p:txBody>
-      </p:sp>
-      <p:sp>
-        <p:nvSpPr>
-          <p:cNvPr id="37" name=""/>
-          <p:cNvSpPr/>
-          <p:nvPr/>
-        </p:nvSpPr>
-        <p:spPr>
-          <a:xfrm rot="0" flipH="0" flipV="0">
+          <a:xfrm>
             <a:off x="0" y="6572250"/>
             <a:ext cx="12192000" cy="285750"/>
           </a:xfrm>
@@ -3525,7 +3108,6 @@
           <a:solidFill>
             <a:srgbClr val="1F3A6E"/>
           </a:solidFill>
-          <a:ln/>
         </p:spPr>
         <p:txBody>
           <a:bodyPr/>
@@ -3534,16 +3116,18 @@
       </p:sp>
       <p:sp>
         <p:nvSpPr>
-          <p:cNvPr id="38" name="" descr="{&quot;isTemplate&quot;:true,&quot;type&quot;:&quot;text&quot;}"/>
+          <p:cNvPr id="32" name="文本框 31" descr="{&quot;isTemplate&quot;:true,&quot;type&quot;:&quot;text&quot;}"/>
           <p:cNvSpPr txBox="1"/>
           <p:nvPr/>
         </p:nvSpPr>
         <p:spPr>
-          <a:xfrm rot="0" flipH="0" flipV="0">
+          <a:xfrm>
             <a:off x="11430000" y="6648450"/>
             <a:ext cx="381000" cy="133350"/>
           </a:xfrm>
-          <a:prstGeom prst="rect"/>
+          <a:prstGeom prst="rect">
+            <a:avLst/>
+          </a:prstGeom>
         </p:spPr>
         <p:txBody>
           <a:bodyPr wrap="none" lIns="0" tIns="0" rIns="0" bIns="0"/>
@@ -3560,17 +3144,28 @@
                     <a:alpha val="80000"/>
                   </a:srgbClr>
                 </a:solidFill>
-                <a:latin typeface="PingFang SC"/>
-                <a:ea typeface="PingFang SC"/>
+                <a:latin typeface="PingFang SC" panose="020B0400000000000000" charset="-122"/>
+                <a:ea typeface="PingFang SC" panose="020B0400000000000000" charset="-122"/>
               </a:rPr>
               <a:t>02 / 02</a:t>
             </a:r>
-            <a:endParaRPr/>
+            <a:endParaRPr lang="en-US" sz="825">
+              <a:solidFill>
+                <a:srgbClr val="FFFFFF">
+                  <a:alpha val="80000"/>
+                </a:srgbClr>
+              </a:solidFill>
+              <a:latin typeface="PingFang SC" panose="020B0400000000000000" charset="-122"/>
+              <a:ea typeface="PingFang SC" panose="020B0400000000000000" charset="-122"/>
+            </a:endParaRPr>
           </a:p>
         </p:txBody>
       </p:sp>
     </p:spTree>
   </p:cSld>
+  <p:clrMapOvr>
+    <a:masterClrMapping/>
+  </p:clrMapOvr>
 </p:sld>
 </file>
 
@@ -3617,7 +3212,7 @@
     </a:clrScheme>
     <a:fontScheme name="Office">
       <a:majorFont>
-        <a:latin typeface="Calibri Light" panose="020F0302020204030204"/>
+        <a:latin typeface="Calibri Light"/>
         <a:ea typeface=""/>
         <a:cs typeface=""/>
         <a:font script="Jpan" typeface="游ゴシック Light"/>
@@ -3650,26 +3245,9 @@
         <a:font script="Viet" typeface="Times New Roman"/>
         <a:font script="Uigh" typeface="Microsoft Uighur"/>
         <a:font script="Geor" typeface="Sylfaen"/>
-        <a:font script="Armn" typeface="Arial"/>
-        <a:font script="Bugi" typeface="Leelawadee UI"/>
-        <a:font script="Bopo" typeface="Microsoft JhengHei"/>
-        <a:font script="Java" typeface="Javanese Text"/>
-        <a:font script="Lisu" typeface="Segoe UI"/>
-        <a:font script="Mymr" typeface="Myanmar Text"/>
-        <a:font script="Nkoo" typeface="Ebrima"/>
-        <a:font script="Olck" typeface="Nirmala UI"/>
-        <a:font script="Osma" typeface="Ebrima"/>
-        <a:font script="Phag" typeface="Phagspa"/>
-        <a:font script="Syrn" typeface="Estrangelo Edessa"/>
-        <a:font script="Syrj" typeface="Estrangelo Edessa"/>
-        <a:font script="Syre" typeface="Estrangelo Edessa"/>
-        <a:font script="Sora" typeface="Nirmala UI"/>
-        <a:font script="Tale" typeface="Microsoft Tai Le"/>
-        <a:font script="Talu" typeface="Microsoft New Tai Lue"/>
-        <a:font script="Tfng" typeface="Ebrima"/>
       </a:majorFont>
       <a:minorFont>
-        <a:latin typeface="Calibri" panose="020F0502020204030204"/>
+        <a:latin typeface="Calibri"/>
         <a:ea typeface=""/>
         <a:cs typeface=""/>
         <a:font script="Jpan" typeface="游ゴシック"/>
@@ -3702,23 +3280,6 @@
         <a:font script="Viet" typeface="Arial"/>
         <a:font script="Uigh" typeface="Microsoft Uighur"/>
         <a:font script="Geor" typeface="Sylfaen"/>
-        <a:font script="Armn" typeface="Arial"/>
-        <a:font script="Bugi" typeface="Leelawadee UI"/>
-        <a:font script="Bopo" typeface="Microsoft JhengHei"/>
-        <a:font script="Java" typeface="Javanese Text"/>
-        <a:font script="Lisu" typeface="Segoe UI"/>
-        <a:font script="Mymr" typeface="Myanmar Text"/>
-        <a:font script="Nkoo" typeface="Ebrima"/>
-        <a:font script="Olck" typeface="Nirmala UI"/>
-        <a:font script="Osma" typeface="Ebrima"/>
-        <a:font script="Phag" typeface="Phagspa"/>
-        <a:font script="Syrn" typeface="Estrangelo Edessa"/>
-        <a:font script="Syrj" typeface="Estrangelo Edessa"/>
-        <a:font script="Syre" typeface="Estrangelo Edessa"/>
-        <a:font script="Sora" typeface="Nirmala UI"/>
-        <a:font script="Tale" typeface="Microsoft Tai Le"/>
-        <a:font script="Talu" typeface="Microsoft New Tai Lue"/>
-        <a:font script="Tfng" typeface="Ebrima"/>
       </a:minorFont>
     </a:fontScheme>
     <a:fmtScheme name="Office">
@@ -3859,6 +3420,11 @@
       </a:bgFillStyleLst>
     </a:fmtScheme>
   </a:themeElements>
+  <a:extLst>
+    <a:ext uri="{05A4C25C-085E-4340-85A3-A5531E510DB2}">
+      <thm15:themeFamily xmlns:thm15="http://schemas.microsoft.com/office/thememl/2012/main" name="Office Theme" id="{62F939B6-93AF-4DB8-9C6B-D6C7DFDC589F}" vid="{4A3C46E8-61CC-4603-A589-7422A47A8E4A}"/>
+    </a:ext>
+  </a:extLst>
 </a:theme>
 </file>
 
@@ -3905,7 +3471,7 @@
     </a:clrScheme>
     <a:fontScheme name="Office">
       <a:majorFont>
-        <a:latin typeface="等线 Light" panose="02110004020202020204"/>
+        <a:latin typeface="等线 Light"/>
         <a:ea typeface=""/>
         <a:cs typeface=""/>
         <a:font script="Jpan" typeface="游ゴシック Light"/>
@@ -3938,26 +3504,9 @@
         <a:font script="Viet" typeface="Times New Roman"/>
         <a:font script="Uigh" typeface="Microsoft Uighur"/>
         <a:font script="Geor" typeface="Sylfaen"/>
-        <a:font script="Armn" typeface="Arial"/>
-        <a:font script="Bugi" typeface="Leelawadee UI"/>
-        <a:font script="Bopo" typeface="Microsoft JhengHei"/>
-        <a:font script="Java" typeface="Javanese Text"/>
-        <a:font script="Lisu" typeface="Segoe UI"/>
-        <a:font script="Mymr" typeface="Myanmar Text"/>
-        <a:font script="Nkoo" typeface="Ebrima"/>
-        <a:font script="Olck" typeface="Nirmala UI"/>
-        <a:font script="Osma" typeface="Ebrima"/>
-        <a:font script="Phag" typeface="Phagspa"/>
-        <a:font script="Syrn" typeface="Estrangelo Edessa"/>
-        <a:font script="Syrj" typeface="Estrangelo Edessa"/>
-        <a:font script="Syre" typeface="Estrangelo Edessa"/>
-        <a:font script="Sora" typeface="Nirmala UI"/>
-        <a:font script="Tale" typeface="Microsoft Tai Le"/>
-        <a:font script="Talu" typeface="Microsoft New Tai Lue"/>
-        <a:font script="Tfng" typeface="Ebrima"/>
       </a:majorFont>
       <a:minorFont>
-        <a:latin typeface="等线" panose="02110004020202020204"/>
+        <a:latin typeface="等线"/>
         <a:ea typeface=""/>
         <a:cs typeface=""/>
         <a:font script="Jpan" typeface="游ゴシック"/>
@@ -3990,23 +3539,6 @@
         <a:font script="Viet" typeface="Arial"/>
         <a:font script="Uigh" typeface="Microsoft Uighur"/>
         <a:font script="Geor" typeface="Sylfaen"/>
-        <a:font script="Armn" typeface="Arial"/>
-        <a:font script="Bugi" typeface="Leelawadee UI"/>
-        <a:font script="Bopo" typeface="Microsoft JhengHei"/>
-        <a:font script="Java" typeface="Javanese Text"/>
-        <a:font script="Lisu" typeface="Segoe UI"/>
-        <a:font script="Mymr" typeface="Myanmar Text"/>
-        <a:font script="Nkoo" typeface="Ebrima"/>
-        <a:font script="Olck" typeface="Nirmala UI"/>
-        <a:font script="Osma" typeface="Ebrima"/>
-        <a:font script="Phag" typeface="Phagspa"/>
-        <a:font script="Syrn" typeface="Estrangelo Edessa"/>
-        <a:font script="Syrj" typeface="Estrangelo Edessa"/>
-        <a:font script="Syre" typeface="Estrangelo Edessa"/>
-        <a:font script="Sora" typeface="Nirmala UI"/>
-        <a:font script="Tale" typeface="Microsoft Tai Le"/>
-        <a:font script="Talu" typeface="Microsoft New Tai Lue"/>
-        <a:font script="Tfng" typeface="Ebrima"/>
       </a:minorFont>
     </a:fontScheme>
     <a:fmtScheme name="Office">
@@ -4147,5 +3679,10 @@
       </a:bgFillStyleLst>
     </a:fmtScheme>
   </a:themeElements>
+  <a:extLst>
+    <a:ext uri="{05A4C25C-085E-4340-85A3-A5531E510DB2}">
+      <thm15:themeFamily xmlns:thm15="http://schemas.microsoft.com/office/thememl/2012/main" name="Office Theme" id="{62F939B6-93AF-4DB8-9C6B-D6C7DFDC589F}" vid="{4A3C46E8-61CC-4603-A589-7422A47A8E4A}"/>
+    </a:ext>
+  </a:extLst>
 </a:theme>
 </file>